--- a/Wound_Cleansing_Presentation.pptx
+++ b/Wound_Cleansing_Presentation.pptx
@@ -12,6 +12,9 @@
     <p:sldId id="260" r:id="rId11"/>
     <p:sldId id="261" r:id="rId12"/>
     <p:sldId id="262" r:id="rId13"/>
+    <p:sldId id="263" r:id="rId14"/>
+    <p:sldId id="264" r:id="rId15"/>
+    <p:sldId id="265" r:id="rId16"/>
   </p:sldIdLst>
   <p:sldSz cx="12191695" cy="6858000" type="screen4x3"/>
   <p:notesSz cx="6858000" cy="9144000"/>
@@ -3290,6 +3293,215 @@
 </p:sld>
 </file>
 
+<file path=ppt/slides/slide10.xml><?xml version="1.0" encoding="utf-8"?>
+<p:sld xmlns:a="http://schemas.openxmlformats.org/drawingml/2006/main" xmlns:p="http://schemas.openxmlformats.org/presentationml/2006/main" xmlns:r="http://schemas.openxmlformats.org/officeDocument/2006/relationships">
+  <p:cSld>
+    <p:bg>
+      <p:bgPr>
+        <a:solidFill>
+          <a:srgbClr val="008080"/>
+        </a:solidFill>
+        <a:effectLst/>
+      </p:bgPr>
+    </p:bg>
+    <p:spTree>
+      <p:nvGrpSpPr>
+        <p:cNvPr id="1" name=""/>
+        <p:cNvGrpSpPr/>
+        <p:nvPr/>
+      </p:nvGrpSpPr>
+      <p:grpSpPr/>
+      <p:sp>
+        <p:nvSpPr>
+          <p:cNvPr id="2" name="TextBox 1"/>
+          <p:cNvSpPr txBox="1"/>
+          <p:nvPr/>
+        </p:nvSpPr>
+        <p:spPr>
+          <a:xfrm>
+            <a:off x="914400" y="1371600"/>
+            <a:ext cx="10058400" cy="1097280"/>
+          </a:xfrm>
+          <a:prstGeom prst="rect">
+            <a:avLst/>
+          </a:prstGeom>
+          <a:noFill/>
+        </p:spPr>
+        <p:txBody>
+          <a:bodyPr wrap="square">
+            <a:spAutoFit/>
+          </a:bodyPr>
+          <a:lstStyle/>
+          <a:p>
+            <a:pPr algn="ctr">
+              <a:defRPr sz="4000" b="1">
+                <a:solidFill>
+                  <a:srgbClr val="FFFFFF"/>
+                </a:solidFill>
+                <a:latin typeface="Calibri"/>
+              </a:defRPr>
+            </a:pPr>
+            <a:r>
+              <a:t>Discussion &amp; Questions</a:t>
+            </a:r>
+          </a:p>
+        </p:txBody>
+      </p:sp>
+      <p:sp>
+        <p:nvSpPr>
+          <p:cNvPr id="3" name="TextBox 2"/>
+          <p:cNvSpPr txBox="1"/>
+          <p:nvPr/>
+        </p:nvSpPr>
+        <p:spPr>
+          <a:xfrm>
+            <a:off x="914400" y="2743200"/>
+            <a:ext cx="10058400" cy="731520"/>
+          </a:xfrm>
+          <a:prstGeom prst="rect">
+            <a:avLst/>
+          </a:prstGeom>
+          <a:noFill/>
+        </p:spPr>
+        <p:txBody>
+          <a:bodyPr wrap="square">
+            <a:spAutoFit/>
+          </a:bodyPr>
+          <a:lstStyle/>
+          <a:p>
+            <a:pPr algn="ctr">
+              <a:defRPr sz="2400" b="0">
+                <a:solidFill>
+                  <a:srgbClr val="C8F0F0"/>
+                </a:solidFill>
+                <a:latin typeface="Calibri"/>
+              </a:defRPr>
+            </a:pPr>
+            <a:r>
+              <a:t>What are your thoughts?</a:t>
+            </a:r>
+          </a:p>
+        </p:txBody>
+      </p:sp>
+      <p:sp>
+        <p:nvSpPr>
+          <p:cNvPr id="4" name="TextBox 3"/>
+          <p:cNvSpPr txBox="1"/>
+          <p:nvPr/>
+        </p:nvSpPr>
+        <p:spPr>
+          <a:xfrm>
+            <a:off x="2286000" y="3657600"/>
+            <a:ext cx="7315200" cy="2286000"/>
+          </a:xfrm>
+          <a:prstGeom prst="rect">
+            <a:avLst/>
+          </a:prstGeom>
+          <a:noFill/>
+        </p:spPr>
+        <p:txBody>
+          <a:bodyPr wrap="square">
+            <a:spAutoFit/>
+          </a:bodyPr>
+          <a:lstStyle/>
+          <a:p>
+            <a:pPr>
+              <a:spcAft>
+                <a:spcPts val="800"/>
+              </a:spcAft>
+              <a:defRPr sz="2000">
+                <a:solidFill>
+                  <a:srgbClr val="C8F0F0"/>
+                </a:solidFill>
+                <a:latin typeface="Calibri"/>
+              </a:defRPr>
+            </a:pPr>
+            <a:r>
+              <a:t>• Would anyone be interested in championing this with me?</a:t>
+            </a:r>
+          </a:p>
+          <a:p>
+            <a:pPr>
+              <a:spcAft>
+                <a:spcPts val="800"/>
+              </a:spcAft>
+              <a:defRPr sz="2000">
+                <a:solidFill>
+                  <a:srgbClr val="C8F0F0"/>
+                </a:solidFill>
+                <a:latin typeface="Calibri"/>
+              </a:defRPr>
+            </a:pPr>
+            <a:r>
+              <a:t>• Can we trial saline-first cleansing for 4 weeks?</a:t>
+            </a:r>
+          </a:p>
+          <a:p>
+            <a:pPr>
+              <a:spcAft>
+                <a:spcPts val="800"/>
+              </a:spcAft>
+              <a:defRPr sz="2000">
+                <a:solidFill>
+                  <a:srgbClr val="C8F0F0"/>
+                </a:solidFill>
+                <a:latin typeface="Calibri"/>
+              </a:defRPr>
+            </a:pPr>
+            <a:r>
+              <a:t>• Would a wound cleansing quick-reference card be useful?</a:t>
+            </a:r>
+          </a:p>
+        </p:txBody>
+      </p:sp>
+      <p:sp>
+        <p:nvSpPr>
+          <p:cNvPr id="5" name="TextBox 4"/>
+          <p:cNvSpPr txBox="1"/>
+          <p:nvPr/>
+        </p:nvSpPr>
+        <p:spPr>
+          <a:xfrm>
+            <a:off x="914400" y="5669280"/>
+            <a:ext cx="10058400" cy="731520"/>
+          </a:xfrm>
+          <a:prstGeom prst="rect">
+            <a:avLst/>
+          </a:prstGeom>
+          <a:noFill/>
+        </p:spPr>
+        <p:txBody>
+          <a:bodyPr wrap="square">
+            <a:spAutoFit/>
+          </a:bodyPr>
+          <a:lstStyle/>
+          <a:p>
+            <a:pPr algn="ctr">
+              <a:defRPr sz="1400" b="0">
+                <a:solidFill>
+                  <a:srgbClr val="A0C8C8"/>
+                </a:solidFill>
+                <a:latin typeface="Calibri"/>
+              </a:defRPr>
+            </a:pPr>
+            <a:r>
+              <a:t>Reference: IWII (2025) Therapeutic Wound &amp; Skin Cleansing:</a:t>
+            </a:r>
+            <a:br/>
+            <a:r>
+              <a:t>Clinical Evidence and Recommendations. Wounds International.</a:t>
+            </a:r>
+          </a:p>
+        </p:txBody>
+      </p:sp>
+    </p:spTree>
+  </p:cSld>
+  <p:clrMapOvr>
+    <a:masterClrMapping/>
+  </p:clrMapOvr>
+</p:sld>
+</file>
+
 <file path=ppt/slides/slide2.xml><?xml version="1.0" encoding="utf-8"?>
 <p:sld xmlns:a="http://schemas.openxmlformats.org/drawingml/2006/main" xmlns:p="http://schemas.openxmlformats.org/presentationml/2006/main" xmlns:r="http://schemas.openxmlformats.org/officeDocument/2006/relationships">
   <p:cSld>
@@ -3348,12 +3560,6 @@
           <a:lstStyle/>
           <a:p>
             <a:pPr algn="ctr">
-              <a:spcBef>
-                <a:spcPts val="0"/>
-              </a:spcBef>
-              <a:spcAft>
-                <a:spcPts val="0"/>
-              </a:spcAft>
               <a:defRPr sz="2800" b="1">
                 <a:solidFill>
                   <a:srgbClr val="FFFFFF"/>
@@ -3494,12 +3700,6 @@
           <a:lstStyle/>
           <a:p>
             <a:pPr algn="ctr">
-              <a:spcBef>
-                <a:spcPts val="0"/>
-              </a:spcBef>
-              <a:spcAft>
-                <a:spcPts val="0"/>
-              </a:spcAft>
               <a:defRPr sz="1800" b="1">
                 <a:solidFill>
                   <a:srgbClr val="006464"/>
@@ -3508,7 +3708,7 @@
               </a:defRPr>
             </a:pPr>
             <a:r>
-              <a:t>🤔 Key Question</a:t>
+              <a:t>Key Question</a:t>
             </a:r>
             <a:br/>
             <a:br/>
@@ -3566,12 +3766,6 @@
           <a:lstStyle/>
           <a:p>
             <a:pPr algn="ctr">
-              <a:spcBef>
-                <a:spcPts val="0"/>
-              </a:spcBef>
-              <a:spcAft>
-                <a:spcPts val="0"/>
-              </a:spcAft>
               <a:defRPr sz="1600" b="0">
                 <a:solidFill>
                   <a:srgbClr val="006464"/>
@@ -3585,23 +3779,23 @@
             <a:br/>
             <a:br/>
             <a:r>
-              <a:t>✓ Systematic literature review</a:t>
-            </a:r>
-            <a:br/>
-            <a:r>
-              <a:t>✓ Delphi consensus process</a:t>
-            </a:r>
-            <a:br/>
-            <a:r>
-              <a:t>✓ 13 clinical recommendations</a:t>
-            </a:r>
-            <a:br/>
-            <a:r>
-              <a:t>✓ International expert panel</a:t>
-            </a:r>
-            <a:br/>
-            <a:r>
-              <a:t>✓ Strongest wound cleansing</a:t>
+              <a:t>&gt; Systematic literature review</a:t>
+            </a:r>
+            <a:br/>
+            <a:r>
+              <a:t>&gt; Delphi consensus process</a:t>
+            </a:r>
+            <a:br/>
+            <a:r>
+              <a:t>&gt; 13 clinical recommendations</a:t>
+            </a:r>
+            <a:br/>
+            <a:r>
+              <a:t>&gt; International expert panel</a:t>
+            </a:r>
+            <a:br/>
+            <a:r>
+              <a:t>&gt; Strongest wound cleansing</a:t>
             </a:r>
             <a:br/>
             <a:r>
@@ -3651,7 +3845,7 @@
             <a:avLst/>
           </a:prstGeom>
           <a:solidFill>
-            <a:srgbClr val="C83232"/>
+            <a:srgbClr val="008080"/>
           </a:solidFill>
           <a:ln>
             <a:noFill/>
@@ -3676,12 +3870,6 @@
           <a:lstStyle/>
           <a:p>
             <a:pPr algn="ctr">
-              <a:spcBef>
-                <a:spcPts val="0"/>
-              </a:spcBef>
-              <a:spcAft>
-                <a:spcPts val="0"/>
-              </a:spcAft>
               <a:defRPr sz="2800" b="1">
                 <a:solidFill>
                   <a:srgbClr val="FFFFFF"/>
@@ -3690,7 +3878,7 @@
               </a:defRPr>
             </a:pPr>
             <a:r>
-              <a:t>The Problem: Chlorhexidine + Cetrimide on Wounds</a:t>
+              <a:t>What Are We Cleansing? — Know Your Wound Status</a:t>
             </a:r>
           </a:p>
         </p:txBody>
@@ -3710,7 +3898,7 @@
             <a:avLst/>
           </a:prstGeom>
           <a:solidFill>
-            <a:srgbClr val="006464"/>
+            <a:srgbClr val="28A050"/>
           </a:solidFill>
           <a:ln>
             <a:noFill/>
@@ -3735,13 +3923,7 @@
           <a:lstStyle/>
           <a:p>
             <a:pPr algn="ctr">
-              <a:spcBef>
-                <a:spcPts val="0"/>
-              </a:spcBef>
-              <a:spcAft>
-                <a:spcPts val="0"/>
-              </a:spcAft>
-              <a:defRPr sz="1800" b="1">
+              <a:defRPr sz="1600" b="1">
                 <a:solidFill>
                   <a:srgbClr val="FFFFFF"/>
                 </a:solidFill>
@@ -3749,21 +3931,98 @@
               </a:defRPr>
             </a:pPr>
             <a:r>
-              <a:t>Cytotoxicity Evidence</a:t>
-            </a:r>
-          </a:p>
-        </p:txBody>
-      </p:sp>
-      <p:sp>
-        <p:nvSpPr>
-          <p:cNvPr id="4" name="TextBox 3"/>
+              <a:t>Clean / Healing Wound</a:t>
+            </a:r>
+          </a:p>
+        </p:txBody>
+      </p:sp>
+      <p:sp>
+        <p:nvSpPr>
+          <p:cNvPr id="4" name="Rounded Rectangle 3"/>
+          <p:cNvSpPr/>
+          <p:nvPr/>
+        </p:nvSpPr>
+        <p:spPr>
+          <a:xfrm>
+            <a:off x="457200" y="1920240"/>
+            <a:ext cx="3474720" cy="2743200"/>
+          </a:xfrm>
+          <a:prstGeom prst="roundRect">
+            <a:avLst/>
+          </a:prstGeom>
+          <a:solidFill>
+            <a:srgbClr val="E6E6E6"/>
+          </a:solidFill>
+          <a:ln w="25400">
+            <a:solidFill>
+              <a:srgbClr val="787878"/>
+            </a:solidFill>
+          </a:ln>
+        </p:spPr>
+        <p:style>
+          <a:lnRef idx="1">
+            <a:schemeClr val="accent1"/>
+          </a:lnRef>
+          <a:fillRef idx="3">
+            <a:schemeClr val="accent1"/>
+          </a:fillRef>
+          <a:effectRef idx="2">
+            <a:schemeClr val="accent1"/>
+          </a:effectRef>
+          <a:fontRef idx="minor">
+            <a:schemeClr val="lt1"/>
+          </a:fontRef>
+        </p:style>
+        <p:txBody>
+          <a:bodyPr rtlCol="0" anchor="ctr" wrap="square"/>
+          <a:lstStyle/>
+          <a:p>
+            <a:pPr algn="ctr">
+              <a:defRPr sz="1400" b="1">
+                <a:solidFill>
+                  <a:srgbClr val="787878"/>
+                </a:solidFill>
+                <a:latin typeface="Calibri"/>
+              </a:defRPr>
+            </a:pPr>
+            <a:r>
+              <a:t>INSERT PHOTO</a:t>
+            </a:r>
+            <a:br/>
+            <a:br/>
+            <a:r>
+              <a:t>Clean granulating wound</a:t>
+            </a:r>
+            <a:br/>
+            <a:r>
+              <a:t>or healing skin tear</a:t>
+            </a:r>
+          </a:p>
+          <a:p>
+            <a:pPr algn="ctr">
+              <a:defRPr sz="1100">
+                <a:solidFill>
+                  <a:srgbClr val="787878"/>
+                </a:solidFill>
+                <a:latin typeface="Calibri"/>
+              </a:defRPr>
+            </a:pPr>
+            <a:r>
+              <a:t>Right-click → Change Picture</a:t>
+            </a:r>
+          </a:p>
+        </p:txBody>
+      </p:sp>
+      <p:sp>
+        <p:nvSpPr>
+          <p:cNvPr id="5" name="TextBox 4"/>
           <p:cNvSpPr txBox="1"/>
           <p:nvPr/>
         </p:nvSpPr>
         <p:spPr>
           <a:xfrm>
-            <a:off x="457200" y="1920240"/>
-            <a:ext cx="3474720" cy="4114800"/>
+            <a:off x="457200" y="4846320"/>
+            <a:ext cx="3474720" cy="1645920"/>
           </a:xfrm>
           <a:prstGeom prst="rect">
             <a:avLst/>
@@ -3778,78 +4037,263 @@
           <a:p>
             <a:pPr>
               <a:spcAft>
-                <a:spcPts val="560"/>
+                <a:spcPts val="520"/>
               </a:spcAft>
-              <a:defRPr sz="1400">
-                <a:solidFill>
-                  <a:srgbClr val="3C3C3C"/>
-                </a:solidFill>
-                <a:latin typeface="Calibri"/>
-              </a:defRPr>
-            </a:pPr>
-            <a:r>
-              <a:t>• Fibroblasts exposed to 0.05% CHX for 15 mins → non-viable within 24 hours</a:t>
+              <a:defRPr sz="1300">
+                <a:solidFill>
+                  <a:srgbClr val="28A050"/>
+                </a:solidFill>
+                <a:latin typeface="Calibri"/>
+              </a:defRPr>
+            </a:pPr>
+            <a:r>
+              <a:t>• Healthy granulation tissue</a:t>
             </a:r>
           </a:p>
           <a:p>
             <a:pPr>
               <a:spcAft>
-                <a:spcPts val="560"/>
+                <a:spcPts val="520"/>
               </a:spcAft>
-              <a:defRPr sz="1400">
-                <a:solidFill>
-                  <a:srgbClr val="3C3C3C"/>
-                </a:solidFill>
-                <a:latin typeface="Calibri"/>
-              </a:defRPr>
-            </a:pPr>
-            <a:r>
-              <a:t>• Even at 0.002% CHX suppresses cell division almost completely</a:t>
+              <a:defRPr sz="1300">
+                <a:solidFill>
+                  <a:srgbClr val="28A050"/>
+                </a:solidFill>
+                <a:latin typeface="Calibri"/>
+              </a:defRPr>
+            </a:pPr>
+            <a:r>
+              <a:t>• No signs of infection</a:t>
             </a:r>
           </a:p>
           <a:p>
             <a:pPr>
               <a:spcAft>
-                <a:spcPts val="560"/>
+                <a:spcPts val="520"/>
               </a:spcAft>
-              <a:defRPr sz="1400">
-                <a:solidFill>
-                  <a:srgbClr val="3C3C3C"/>
-                </a:solidFill>
-                <a:latin typeface="Calibri"/>
-              </a:defRPr>
-            </a:pPr>
-            <a:r>
-              <a:t>• Cetrimide adds further cytotoxic burden — a surfactant that disrupts cell membranes</a:t>
-            </a:r>
-          </a:p>
+              <a:defRPr sz="1300">
+                <a:solidFill>
+                  <a:srgbClr val="28A050"/>
+                </a:solidFill>
+                <a:latin typeface="Calibri"/>
+              </a:defRPr>
+            </a:pPr>
+            <a:r>
+              <a:t>• Cleanse with SALINE only</a:t>
+            </a:r>
+          </a:p>
+        </p:txBody>
+      </p:sp>
+      <p:sp>
+        <p:nvSpPr>
+          <p:cNvPr id="6" name="Rounded Rectangle 5"/>
+          <p:cNvSpPr/>
+          <p:nvPr/>
+        </p:nvSpPr>
+        <p:spPr>
+          <a:xfrm>
+            <a:off x="4297680" y="1188720"/>
+            <a:ext cx="3474720" cy="548640"/>
+          </a:xfrm>
+          <a:prstGeom prst="roundRect">
+            <a:avLst/>
+          </a:prstGeom>
+          <a:solidFill>
+            <a:srgbClr val="DCA01E"/>
+          </a:solidFill>
+          <a:ln>
+            <a:noFill/>
+          </a:ln>
+        </p:spPr>
+        <p:style>
+          <a:lnRef idx="1">
+            <a:schemeClr val="accent1"/>
+          </a:lnRef>
+          <a:fillRef idx="3">
+            <a:schemeClr val="accent1"/>
+          </a:fillRef>
+          <a:effectRef idx="2">
+            <a:schemeClr val="accent1"/>
+          </a:effectRef>
+          <a:fontRef idx="minor">
+            <a:schemeClr val="lt1"/>
+          </a:fontRef>
+        </p:style>
+        <p:txBody>
+          <a:bodyPr rtlCol="0" anchor="ctr" wrap="square"/>
+          <a:lstStyle/>
+          <a:p>
+            <a:pPr algn="ctr">
+              <a:defRPr sz="1600" b="1">
+                <a:solidFill>
+                  <a:srgbClr val="FFFFFF"/>
+                </a:solidFill>
+                <a:latin typeface="Calibri"/>
+              </a:defRPr>
+            </a:pPr>
+            <a:r>
+              <a:t>Biofilm / At Risk</a:t>
+            </a:r>
+          </a:p>
+        </p:txBody>
+      </p:sp>
+      <p:sp>
+        <p:nvSpPr>
+          <p:cNvPr id="7" name="Rounded Rectangle 6"/>
+          <p:cNvSpPr/>
+          <p:nvPr/>
+        </p:nvSpPr>
+        <p:spPr>
+          <a:xfrm>
+            <a:off x="4297680" y="1920240"/>
+            <a:ext cx="3474720" cy="2743200"/>
+          </a:xfrm>
+          <a:prstGeom prst="roundRect">
+            <a:avLst/>
+          </a:prstGeom>
+          <a:solidFill>
+            <a:srgbClr val="E6E6E6"/>
+          </a:solidFill>
+          <a:ln w="25400">
+            <a:solidFill>
+              <a:srgbClr val="787878"/>
+            </a:solidFill>
+          </a:ln>
+        </p:spPr>
+        <p:style>
+          <a:lnRef idx="1">
+            <a:schemeClr val="accent1"/>
+          </a:lnRef>
+          <a:fillRef idx="3">
+            <a:schemeClr val="accent1"/>
+          </a:fillRef>
+          <a:effectRef idx="2">
+            <a:schemeClr val="accent1"/>
+          </a:effectRef>
+          <a:fontRef idx="minor">
+            <a:schemeClr val="lt1"/>
+          </a:fontRef>
+        </p:style>
+        <p:txBody>
+          <a:bodyPr rtlCol="0" anchor="ctr" wrap="square"/>
+          <a:lstStyle/>
+          <a:p>
+            <a:pPr algn="ctr">
+              <a:defRPr sz="1400" b="1">
+                <a:solidFill>
+                  <a:srgbClr val="787878"/>
+                </a:solidFill>
+                <a:latin typeface="Calibri"/>
+              </a:defRPr>
+            </a:pPr>
+            <a:r>
+              <a:t>INSERT PHOTO</a:t>
+            </a:r>
+            <a:br/>
+            <a:br/>
+            <a:r>
+              <a:t>Wound with suspected biofilm</a:t>
+            </a:r>
+            <a:br/>
+            <a:r>
+              <a:t>or stalled healing</a:t>
+            </a:r>
+          </a:p>
+          <a:p>
+            <a:pPr algn="ctr">
+              <a:defRPr sz="1100">
+                <a:solidFill>
+                  <a:srgbClr val="787878"/>
+                </a:solidFill>
+                <a:latin typeface="Calibri"/>
+              </a:defRPr>
+            </a:pPr>
+            <a:r>
+              <a:t>Right-click → Change Picture</a:t>
+            </a:r>
+          </a:p>
+        </p:txBody>
+      </p:sp>
+      <p:sp>
+        <p:nvSpPr>
+          <p:cNvPr id="8" name="TextBox 7"/>
+          <p:cNvSpPr txBox="1"/>
+          <p:nvPr/>
+        </p:nvSpPr>
+        <p:spPr>
+          <a:xfrm>
+            <a:off x="4297680" y="4846320"/>
+            <a:ext cx="3474720" cy="1645920"/>
+          </a:xfrm>
+          <a:prstGeom prst="rect">
+            <a:avLst/>
+          </a:prstGeom>
+          <a:noFill/>
+        </p:spPr>
+        <p:txBody>
+          <a:bodyPr wrap="square">
+            <a:spAutoFit/>
+          </a:bodyPr>
+          <a:lstStyle/>
           <a:p>
             <a:pPr>
               <a:spcAft>
-                <a:spcPts val="560"/>
+                <a:spcPts val="520"/>
               </a:spcAft>
-              <a:defRPr sz="1400">
-                <a:solidFill>
-                  <a:srgbClr val="3C3C3C"/>
-                </a:solidFill>
-                <a:latin typeface="Calibri"/>
-              </a:defRPr>
-            </a:pPr>
-            <a:r>
-              <a:t>• Dose- and time-dependent damage to the very cells that heal wounds</a:t>
-            </a:r>
-          </a:p>
-        </p:txBody>
-      </p:sp>
-      <p:sp>
-        <p:nvSpPr>
-          <p:cNvPr id="5" name="Rounded Rectangle 4"/>
+              <a:defRPr sz="1300">
+                <a:solidFill>
+                  <a:srgbClr val="DCA01E"/>
+                </a:solidFill>
+                <a:latin typeface="Calibri"/>
+              </a:defRPr>
+            </a:pPr>
+            <a:r>
+              <a:t>• Slimy / shiny wound bed</a:t>
+            </a:r>
+          </a:p>
+          <a:p>
+            <a:pPr>
+              <a:spcAft>
+                <a:spcPts val="520"/>
+              </a:spcAft>
+              <a:defRPr sz="1300">
+                <a:solidFill>
+                  <a:srgbClr val="DCA01E"/>
+                </a:solidFill>
+                <a:latin typeface="Calibri"/>
+              </a:defRPr>
+            </a:pPr>
+            <a:r>
+              <a:t>• Stalled healing despite treatment</a:t>
+            </a:r>
+          </a:p>
+          <a:p>
+            <a:pPr>
+              <a:spcAft>
+                <a:spcPts val="520"/>
+              </a:spcAft>
+              <a:defRPr sz="1300">
+                <a:solidFill>
+                  <a:srgbClr val="DCA01E"/>
+                </a:solidFill>
+                <a:latin typeface="Calibri"/>
+              </a:defRPr>
+            </a:pPr>
+            <a:r>
+              <a:t>• Consider antimicrobial cleanser</a:t>
+            </a:r>
+          </a:p>
+        </p:txBody>
+      </p:sp>
+      <p:sp>
+        <p:nvSpPr>
+          <p:cNvPr id="9" name="Rounded Rectangle 8"/>
           <p:cNvSpPr/>
           <p:nvPr/>
         </p:nvSpPr>
         <p:spPr>
           <a:xfrm>
-            <a:off x="4297680" y="1188720"/>
+            <a:off x="8138160" y="1188720"/>
             <a:ext cx="3474720" cy="548640"/>
           </a:xfrm>
           <a:prstGeom prst="roundRect">
@@ -3881,13 +4325,7 @@
           <a:lstStyle/>
           <a:p>
             <a:pPr algn="ctr">
-              <a:spcBef>
-                <a:spcPts val="0"/>
-              </a:spcBef>
-              <a:spcAft>
-                <a:spcPts val="0"/>
-              </a:spcAft>
-              <a:defRPr sz="1800" b="1">
+              <a:defRPr sz="1600" b="1">
                 <a:solidFill>
                   <a:srgbClr val="FFFFFF"/>
                 </a:solidFill>
@@ -3895,117 +4333,32 @@
               </a:defRPr>
             </a:pPr>
             <a:r>
-              <a:t>What Gets Damaged?</a:t>
-            </a:r>
-          </a:p>
-        </p:txBody>
-      </p:sp>
-      <p:sp>
-        <p:nvSpPr>
-          <p:cNvPr id="6" name="TextBox 5"/>
-          <p:cNvSpPr txBox="1"/>
-          <p:nvPr/>
-        </p:nvSpPr>
-        <p:spPr>
-          <a:xfrm>
-            <a:off x="4297680" y="1920240"/>
-            <a:ext cx="3474720" cy="4114800"/>
-          </a:xfrm>
-          <a:prstGeom prst="rect">
-            <a:avLst/>
-          </a:prstGeom>
-          <a:noFill/>
-        </p:spPr>
-        <p:txBody>
-          <a:bodyPr wrap="square">
-            <a:spAutoFit/>
-          </a:bodyPr>
-          <a:lstStyle/>
-          <a:p>
-            <a:pPr>
-              <a:spcAft>
-                <a:spcPts val="560"/>
-              </a:spcAft>
-              <a:defRPr sz="1400">
-                <a:solidFill>
-                  <a:srgbClr val="3C3C3C"/>
-                </a:solidFill>
-                <a:latin typeface="Calibri"/>
-              </a:defRPr>
-            </a:pPr>
-            <a:r>
-              <a:t>• Fibroblasts — produce collagen and extracellular matrix for wound repair</a:t>
-            </a:r>
-          </a:p>
-          <a:p>
-            <a:pPr>
-              <a:spcAft>
-                <a:spcPts val="560"/>
-              </a:spcAft>
-              <a:defRPr sz="1400">
-                <a:solidFill>
-                  <a:srgbClr val="3C3C3C"/>
-                </a:solidFill>
-                <a:latin typeface="Calibri"/>
-              </a:defRPr>
-            </a:pPr>
-            <a:r>
-              <a:t>• Keratinocytes — drive re-epithelialisation and wound closure</a:t>
-            </a:r>
-          </a:p>
-          <a:p>
-            <a:pPr>
-              <a:spcAft>
-                <a:spcPts val="560"/>
-              </a:spcAft>
-              <a:defRPr sz="1400">
-                <a:solidFill>
-                  <a:srgbClr val="3C3C3C"/>
-                </a:solidFill>
-                <a:latin typeface="Calibri"/>
-              </a:defRPr>
-            </a:pPr>
-            <a:r>
-              <a:t>• Growth factors — disrupted signalling cascades</a:t>
-            </a:r>
-          </a:p>
-          <a:p>
-            <a:pPr>
-              <a:spcAft>
-                <a:spcPts val="560"/>
-              </a:spcAft>
-              <a:defRPr sz="1400">
-                <a:solidFill>
-                  <a:srgbClr val="3C3C3C"/>
-                </a:solidFill>
-                <a:latin typeface="Calibri"/>
-              </a:defRPr>
-            </a:pPr>
-            <a:r>
-              <a:t>• Granulation tissue — the foundation of healing</a:t>
-            </a:r>
-          </a:p>
-        </p:txBody>
-      </p:sp>
-      <p:sp>
-        <p:nvSpPr>
-          <p:cNvPr id="7" name="Rounded Rectangle 6"/>
+              <a:t>Infected Wound</a:t>
+            </a:r>
+          </a:p>
+        </p:txBody>
+      </p:sp>
+      <p:sp>
+        <p:nvSpPr>
+          <p:cNvPr id="10" name="Rounded Rectangle 9"/>
           <p:cNvSpPr/>
           <p:nvPr/>
         </p:nvSpPr>
         <p:spPr>
           <a:xfrm>
-            <a:off x="8138160" y="1188720"/>
-            <a:ext cx="3474720" cy="548640"/>
+            <a:off x="8138160" y="1920240"/>
+            <a:ext cx="3474720" cy="2743200"/>
           </a:xfrm>
           <a:prstGeom prst="roundRect">
             <a:avLst/>
           </a:prstGeom>
           <a:solidFill>
-            <a:srgbClr val="DCA01E"/>
+            <a:srgbClr val="E6E6E6"/>
           </a:solidFill>
-          <a:ln>
-            <a:noFill/>
+          <a:ln w="25400">
+            <a:solidFill>
+              <a:srgbClr val="787878"/>
+            </a:solidFill>
           </a:ln>
         </p:spPr>
         <p:style>
@@ -4027,35 +4380,51 @@
           <a:lstStyle/>
           <a:p>
             <a:pPr algn="ctr">
-              <a:spcBef>
-                <a:spcPts val="0"/>
-              </a:spcBef>
-              <a:spcAft>
-                <a:spcPts val="0"/>
-              </a:spcAft>
-              <a:defRPr sz="1800" b="1">
-                <a:solidFill>
-                  <a:srgbClr val="FFFFFF"/>
-                </a:solidFill>
-                <a:latin typeface="Calibri"/>
-              </a:defRPr>
-            </a:pPr>
-            <a:r>
-              <a:t>Clinical Impact</a:t>
-            </a:r>
-          </a:p>
-        </p:txBody>
-      </p:sp>
-      <p:sp>
-        <p:nvSpPr>
-          <p:cNvPr id="8" name="TextBox 7"/>
+              <a:defRPr sz="1400" b="1">
+                <a:solidFill>
+                  <a:srgbClr val="787878"/>
+                </a:solidFill>
+                <a:latin typeface="Calibri"/>
+              </a:defRPr>
+            </a:pPr>
+            <a:r>
+              <a:t>INSERT PHOTO</a:t>
+            </a:r>
+            <a:br/>
+            <a:br/>
+            <a:r>
+              <a:t>Clinically infected wound</a:t>
+            </a:r>
+            <a:br/>
+            <a:r>
+              <a:t>(spreading erythema, purulence)</a:t>
+            </a:r>
+          </a:p>
+          <a:p>
+            <a:pPr algn="ctr">
+              <a:defRPr sz="1100">
+                <a:solidFill>
+                  <a:srgbClr val="787878"/>
+                </a:solidFill>
+                <a:latin typeface="Calibri"/>
+              </a:defRPr>
+            </a:pPr>
+            <a:r>
+              <a:t>Right-click → Change Picture</a:t>
+            </a:r>
+          </a:p>
+        </p:txBody>
+      </p:sp>
+      <p:sp>
+        <p:nvSpPr>
+          <p:cNvPr id="11" name="TextBox 10"/>
           <p:cNvSpPr txBox="1"/>
           <p:nvPr/>
         </p:nvSpPr>
         <p:spPr>
           <a:xfrm>
-            <a:off x="8138160" y="1920240"/>
-            <a:ext cx="3474720" cy="4114800"/>
+            <a:off x="8138160" y="4846320"/>
+            <a:ext cx="3474720" cy="1645920"/>
           </a:xfrm>
           <a:prstGeom prst="rect">
             <a:avLst/>
@@ -4070,116 +4439,41 @@
           <a:p>
             <a:pPr>
               <a:spcAft>
-                <a:spcPts val="560"/>
+                <a:spcPts val="520"/>
               </a:spcAft>
-              <a:defRPr sz="1400">
-                <a:solidFill>
-                  <a:srgbClr val="3C3C3C"/>
-                </a:solidFill>
-                <a:latin typeface="Calibri"/>
-              </a:defRPr>
-            </a:pPr>
-            <a:r>
-              <a:t>• Delayed wound healing — more visits, more costs, more patient burden</a:t>
+              <a:defRPr sz="1300">
+                <a:solidFill>
+                  <a:srgbClr val="C83232"/>
+                </a:solidFill>
+                <a:latin typeface="Calibri"/>
+              </a:defRPr>
+            </a:pPr>
+            <a:r>
+              <a:t>• Classic infection signs (NERDS/STONEES)</a:t>
             </a:r>
           </a:p>
           <a:p>
             <a:pPr>
               <a:spcAft>
-                <a:spcPts val="560"/>
+                <a:spcPts val="520"/>
               </a:spcAft>
-              <a:defRPr sz="1400">
-                <a:solidFill>
-                  <a:srgbClr val="3C3C3C"/>
-                </a:solidFill>
-                <a:latin typeface="Calibri"/>
-              </a:defRPr>
-            </a:pPr>
-            <a:r>
-              <a:t>• No evidence of benefit for routine use on non-infected wounds</a:t>
+              <a:defRPr sz="1300">
+                <a:solidFill>
+                  <a:srgbClr val="C83232"/>
+                </a:solidFill>
+                <a:latin typeface="Calibri"/>
+              </a:defRPr>
+            </a:pPr>
+            <a:r>
+              <a:t>• Systemic + local treatment</a:t>
             </a:r>
           </a:p>
           <a:p>
             <a:pPr>
               <a:spcAft>
-                <a:spcPts val="560"/>
+                <a:spcPts val="520"/>
               </a:spcAft>
-              <a:defRPr sz="1400">
-                <a:solidFill>
-                  <a:srgbClr val="3C3C3C"/>
-                </a:solidFill>
-                <a:latin typeface="Calibri"/>
-              </a:defRPr>
-            </a:pPr>
-            <a:r>
-              <a:t>• CHX group showed more days to healing vs saline in comparative studies</a:t>
-            </a:r>
-          </a:p>
-          <a:p>
-            <a:pPr>
-              <a:spcAft>
-                <a:spcPts val="560"/>
-              </a:spcAft>
-              <a:defRPr sz="1400">
-                <a:solidFill>
-                  <a:srgbClr val="3C3C3C"/>
-                </a:solidFill>
-                <a:latin typeface="Calibri"/>
-              </a:defRPr>
-            </a:pPr>
-            <a:r>
-              <a:t>• We may be undoing our good wound management with every dressing change</a:t>
-            </a:r>
-          </a:p>
-        </p:txBody>
-      </p:sp>
-      <p:sp>
-        <p:nvSpPr>
-          <p:cNvPr id="9" name="Rounded Rectangle 8"/>
-          <p:cNvSpPr/>
-          <p:nvPr/>
-        </p:nvSpPr>
-        <p:spPr>
-          <a:xfrm>
-            <a:off x="1371600" y="5303520"/>
-            <a:ext cx="9144000" cy="1097280"/>
-          </a:xfrm>
-          <a:prstGeom prst="roundRect">
-            <a:avLst/>
-          </a:prstGeom>
-          <a:solidFill>
-            <a:srgbClr val="FFF0F0"/>
-          </a:solidFill>
-          <a:ln>
-            <a:noFill/>
-          </a:ln>
-        </p:spPr>
-        <p:style>
-          <a:lnRef idx="1">
-            <a:schemeClr val="accent1"/>
-          </a:lnRef>
-          <a:fillRef idx="3">
-            <a:schemeClr val="accent1"/>
-          </a:fillRef>
-          <a:effectRef idx="2">
-            <a:schemeClr val="accent1"/>
-          </a:effectRef>
-          <a:fontRef idx="minor">
-            <a:schemeClr val="lt1"/>
-          </a:fontRef>
-        </p:style>
-        <p:txBody>
-          <a:bodyPr rtlCol="0" anchor="ctr" wrap="square"/>
-          <a:lstStyle/>
-          <a:p>
-            <a:pPr algn="ctr">
-              <a:spcBef>
-                <a:spcPts val="0"/>
-              </a:spcBef>
-              <a:spcAft>
-                <a:spcPts val="0"/>
-              </a:spcAft>
-              <a:defRPr sz="1600" b="0">
+              <a:defRPr sz="1300">
                 <a:solidFill>
                   <a:srgbClr val="C83232"/>
                 </a:solidFill>
@@ -4187,11 +4481,7 @@
               </a:defRPr>
             </a:pPr>
             <a:r>
-              <a:t>"Antiseptics should not be used routinely on wounds that are healing normally"</a:t>
-            </a:r>
-            <a:br/>
-            <a:r>
-              <a:t>— Consistent finding across wound care literature</a:t>
+              <a:t>• Targeted short-term antiseptic</a:t>
             </a:r>
           </a:p>
         </p:txBody>
@@ -4237,7 +4527,7 @@
             <a:avLst/>
           </a:prstGeom>
           <a:solidFill>
-            <a:srgbClr val="008080"/>
+            <a:srgbClr val="DCA01E"/>
           </a:solidFill>
           <a:ln>
             <a:noFill/>
@@ -4262,44 +4552,127 @@
           <a:lstStyle/>
           <a:p>
             <a:pPr algn="ctr">
-              <a:spcBef>
-                <a:spcPts val="0"/>
-              </a:spcBef>
+              <a:defRPr sz="2800" b="1">
+                <a:solidFill>
+                  <a:srgbClr val="FFFFFF"/>
+                </a:solidFill>
+                <a:latin typeface="Calibri"/>
+              </a:defRPr>
+            </a:pPr>
+            <a:r>
+              <a:t>What Is Biofilm? — A Quick Primer</a:t>
+            </a:r>
+          </a:p>
+        </p:txBody>
+      </p:sp>
+      <p:sp>
+        <p:nvSpPr>
+          <p:cNvPr id="3" name="TextBox 2"/>
+          <p:cNvSpPr txBox="1"/>
+          <p:nvPr/>
+        </p:nvSpPr>
+        <p:spPr>
+          <a:xfrm>
+            <a:off x="457200" y="1188720"/>
+            <a:ext cx="5303520" cy="2286000"/>
+          </a:xfrm>
+          <a:prstGeom prst="rect">
+            <a:avLst/>
+          </a:prstGeom>
+          <a:noFill/>
+        </p:spPr>
+        <p:txBody>
+          <a:bodyPr wrap="square">
+            <a:spAutoFit/>
+          </a:bodyPr>
+          <a:lstStyle/>
+          <a:p>
+            <a:pPr>
               <a:spcAft>
-                <a:spcPts val="0"/>
+                <a:spcPts val="640"/>
               </a:spcAft>
-              <a:defRPr sz="2800" b="1">
-                <a:solidFill>
-                  <a:srgbClr val="FFFFFF"/>
-                </a:solidFill>
-                <a:latin typeface="Calibri"/>
-              </a:defRPr>
-            </a:pPr>
-            <a:r>
-              <a:t>What Should We Use? — IWII 2025 Guidance</a:t>
-            </a:r>
-          </a:p>
-        </p:txBody>
-      </p:sp>
-      <p:sp>
-        <p:nvSpPr>
-          <p:cNvPr id="3" name="Rounded Rectangle 2"/>
+              <a:defRPr sz="1600">
+                <a:solidFill>
+                  <a:srgbClr val="3C3C3C"/>
+                </a:solidFill>
+                <a:latin typeface="Calibri"/>
+              </a:defRPr>
+            </a:pPr>
+            <a:r>
+              <a:t>• A biofilm is a community of bacteria that stick together and coat themselves in a protective slime layer (matrix)</a:t>
+            </a:r>
+          </a:p>
+          <a:p>
+            <a:pPr>
+              <a:spcAft>
+                <a:spcPts val="640"/>
+              </a:spcAft>
+              <a:defRPr sz="1600">
+                <a:solidFill>
+                  <a:srgbClr val="3C3C3C"/>
+                </a:solidFill>
+                <a:latin typeface="Calibri"/>
+              </a:defRPr>
+            </a:pPr>
+            <a:r>
+              <a:t>• This matrix shields bacteria from antibiotics, antiseptics, and the body's immune response</a:t>
+            </a:r>
+          </a:p>
+          <a:p>
+            <a:pPr>
+              <a:spcAft>
+                <a:spcPts val="640"/>
+              </a:spcAft>
+              <a:defRPr sz="1600">
+                <a:solidFill>
+                  <a:srgbClr val="3C3C3C"/>
+                </a:solidFill>
+                <a:latin typeface="Calibri"/>
+              </a:defRPr>
+            </a:pPr>
+            <a:r>
+              <a:t>• Present in up to 78% of chronic wounds</a:t>
+            </a:r>
+          </a:p>
+          <a:p>
+            <a:pPr>
+              <a:spcAft>
+                <a:spcPts val="640"/>
+              </a:spcAft>
+              <a:defRPr sz="1600">
+                <a:solidFill>
+                  <a:srgbClr val="3C3C3C"/>
+                </a:solidFill>
+                <a:latin typeface="Calibri"/>
+              </a:defRPr>
+            </a:pPr>
+            <a:r>
+              <a:t>• Often invisible to the naked eye — but can appear as a slimy, shiny coating on the wound bed</a:t>
+            </a:r>
+          </a:p>
+        </p:txBody>
+      </p:sp>
+      <p:sp>
+        <p:nvSpPr>
+          <p:cNvPr id="4" name="Rounded Rectangle 3"/>
           <p:cNvSpPr/>
           <p:nvPr/>
         </p:nvSpPr>
         <p:spPr>
           <a:xfrm>
-            <a:off x="457200" y="1188720"/>
-            <a:ext cx="3474720" cy="640080"/>
+            <a:off x="6400800" y="1188720"/>
+            <a:ext cx="5029200" cy="2286000"/>
           </a:xfrm>
           <a:prstGeom prst="roundRect">
             <a:avLst/>
           </a:prstGeom>
           <a:solidFill>
-            <a:srgbClr val="28A050"/>
+            <a:srgbClr val="E6E6E6"/>
           </a:solidFill>
-          <a:ln>
-            <a:noFill/>
+          <a:ln w="25400">
+            <a:solidFill>
+              <a:srgbClr val="787878"/>
+            </a:solidFill>
           </a:ln>
         </p:spPr>
         <p:style>
@@ -4321,172 +4694,37 @@
           <a:lstStyle/>
           <a:p>
             <a:pPr algn="ctr">
-              <a:spcBef>
-                <a:spcPts val="0"/>
-              </a:spcBef>
-              <a:spcAft>
-                <a:spcPts val="0"/>
-              </a:spcAft>
-              <a:defRPr sz="1600" b="1">
-                <a:solidFill>
-                  <a:srgbClr val="FFFFFF"/>
-                </a:solidFill>
-                <a:latin typeface="Calibri"/>
-              </a:defRPr>
-            </a:pPr>
-            <a:r>
-              <a:t>✅  Clean / Healing Wounds</a:t>
-            </a:r>
-          </a:p>
-        </p:txBody>
-      </p:sp>
-      <p:sp>
-        <p:nvSpPr>
-          <p:cNvPr id="4" name="TextBox 3"/>
-          <p:cNvSpPr txBox="1"/>
-          <p:nvPr/>
-        </p:nvSpPr>
-        <p:spPr>
-          <a:xfrm>
-            <a:off x="457200" y="2011680"/>
-            <a:ext cx="3474720" cy="3200400"/>
-          </a:xfrm>
-          <a:prstGeom prst="rect">
-            <a:avLst/>
-          </a:prstGeom>
-          <a:noFill/>
-        </p:spPr>
-        <p:txBody>
-          <a:bodyPr wrap="square">
-            <a:spAutoFit/>
-          </a:bodyPr>
-          <a:lstStyle/>
-          <a:p>
-            <a:pPr>
-              <a:spcAft>
-                <a:spcPts val="560"/>
-              </a:spcAft>
-              <a:defRPr sz="1400">
-                <a:solidFill>
-                  <a:srgbClr val="3C3C3C"/>
-                </a:solidFill>
-                <a:latin typeface="Calibri"/>
-              </a:defRPr>
-            </a:pPr>
-            <a:r>
-              <a:t>• Normal saline (0.9% NaCl)</a:t>
-            </a:r>
-          </a:p>
-          <a:p>
-            <a:pPr>
-              <a:spcAft>
-                <a:spcPts val="560"/>
-              </a:spcAft>
-              <a:defRPr sz="1400">
-                <a:solidFill>
-                  <a:srgbClr val="3C3C3C"/>
-                </a:solidFill>
-                <a:latin typeface="Calibri"/>
-              </a:defRPr>
-            </a:pPr>
-            <a:r>
-              <a:t>• Potable/tap water</a:t>
-            </a:r>
-          </a:p>
-          <a:p>
-            <a:pPr>
-              <a:spcAft>
-                <a:spcPts val="560"/>
-              </a:spcAft>
-              <a:defRPr sz="1400">
-                <a:solidFill>
-                  <a:srgbClr val="3C3C3C"/>
-                </a:solidFill>
-                <a:latin typeface="Calibri"/>
-              </a:defRPr>
-            </a:pPr>
-            <a:r>
-              <a:t>• Sterile water</a:t>
-            </a:r>
-          </a:p>
-          <a:p>
-            <a:pPr>
-              <a:spcAft>
-                <a:spcPts val="560"/>
-              </a:spcAft>
-              <a:defRPr sz="1400">
-                <a:solidFill>
-                  <a:srgbClr val="3C3C3C"/>
-                </a:solidFill>
-                <a:latin typeface="Calibri"/>
-              </a:defRPr>
-            </a:pPr>
-            <a:r>
-              <a:t>• </a:t>
-            </a:r>
-          </a:p>
-          <a:p>
-            <a:pPr>
-              <a:spcAft>
-                <a:spcPts val="560"/>
-              </a:spcAft>
-              <a:defRPr sz="1400">
-                <a:solidFill>
-                  <a:srgbClr val="3C3C3C"/>
-                </a:solidFill>
-                <a:latin typeface="Calibri"/>
-              </a:defRPr>
-            </a:pPr>
-            <a:r>
-              <a:t>• Non-cytotoxic, non-allergenic</a:t>
-            </a:r>
-          </a:p>
-          <a:p>
-            <a:pPr>
-              <a:spcAft>
-                <a:spcPts val="560"/>
-              </a:spcAft>
-              <a:defRPr sz="1400">
-                <a:solidFill>
-                  <a:srgbClr val="3C3C3C"/>
-                </a:solidFill>
-                <a:latin typeface="Calibri"/>
-              </a:defRPr>
-            </a:pPr>
-            <a:r>
-              <a:t>• Supports the healing environment</a:t>
-            </a:r>
-          </a:p>
-          <a:p>
-            <a:pPr>
-              <a:spcAft>
-                <a:spcPts val="560"/>
-              </a:spcAft>
-              <a:defRPr sz="1400">
-                <a:solidFill>
-                  <a:srgbClr val="3C3C3C"/>
-                </a:solidFill>
-                <a:latin typeface="Calibri"/>
-              </a:defRPr>
-            </a:pPr>
-            <a:r>
-              <a:t>• Maintains optimal wound pH (4–5.5)</a:t>
-            </a:r>
-          </a:p>
-          <a:p>
-            <a:pPr>
-              <a:spcAft>
-                <a:spcPts val="560"/>
-              </a:spcAft>
-              <a:defRPr sz="1400">
-                <a:solidFill>
-                  <a:srgbClr val="3C3C3C"/>
-                </a:solidFill>
-                <a:latin typeface="Calibri"/>
-              </a:defRPr>
-            </a:pPr>
-            <a:r>
-              <a:t>• This covers MOST of our wounds</a:t>
+              <a:defRPr sz="1400" b="1">
+                <a:solidFill>
+                  <a:srgbClr val="787878"/>
+                </a:solidFill>
+                <a:latin typeface="Calibri"/>
+              </a:defRPr>
+            </a:pPr>
+            <a:r>
+              <a:t>INSERT PHOTO</a:t>
+            </a:r>
+            <a:br/>
+            <a:br/>
+            <a:r>
+              <a:t>Biofilm on a wound bed</a:t>
+            </a:r>
+            <a:br/>
+            <a:r>
+              <a:t>(slimy/shiny appearance)</a:t>
+            </a:r>
+          </a:p>
+          <a:p>
+            <a:pPr algn="ctr">
+              <a:defRPr sz="1100">
+                <a:solidFill>
+                  <a:srgbClr val="787878"/>
+                </a:solidFill>
+                <a:latin typeface="Calibri"/>
+              </a:defRPr>
+            </a:pPr>
+            <a:r>
+              <a:t>Right-click → Change Picture</a:t>
             </a:r>
           </a:p>
         </p:txBody>
@@ -4499,428 +4737,8 @@
         </p:nvSpPr>
         <p:spPr>
           <a:xfrm>
-            <a:off x="4297680" y="1188720"/>
-            <a:ext cx="3474720" cy="640080"/>
-          </a:xfrm>
-          <a:prstGeom prst="roundRect">
-            <a:avLst/>
-          </a:prstGeom>
-          <a:solidFill>
-            <a:srgbClr val="DCA01E"/>
-          </a:solidFill>
-          <a:ln>
-            <a:noFill/>
-          </a:ln>
-        </p:spPr>
-        <p:style>
-          <a:lnRef idx="1">
-            <a:schemeClr val="accent1"/>
-          </a:lnRef>
-          <a:fillRef idx="3">
-            <a:schemeClr val="accent1"/>
-          </a:fillRef>
-          <a:effectRef idx="2">
-            <a:schemeClr val="accent1"/>
-          </a:effectRef>
-          <a:fontRef idx="minor">
-            <a:schemeClr val="lt1"/>
-          </a:fontRef>
-        </p:style>
-        <p:txBody>
-          <a:bodyPr rtlCol="0" anchor="ctr" wrap="square"/>
-          <a:lstStyle/>
-          <a:p>
-            <a:pPr algn="ctr">
-              <a:spcBef>
-                <a:spcPts val="0"/>
-              </a:spcBef>
-              <a:spcAft>
-                <a:spcPts val="0"/>
-              </a:spcAft>
-              <a:defRPr sz="1600" b="1">
-                <a:solidFill>
-                  <a:srgbClr val="FFFFFF"/>
-                </a:solidFill>
-                <a:latin typeface="Calibri"/>
-              </a:defRPr>
-            </a:pPr>
-            <a:r>
-              <a:t>⚠️  Infection Risk / Biofilm</a:t>
-            </a:r>
-          </a:p>
-        </p:txBody>
-      </p:sp>
-      <p:sp>
-        <p:nvSpPr>
-          <p:cNvPr id="6" name="TextBox 5"/>
-          <p:cNvSpPr txBox="1"/>
-          <p:nvPr/>
-        </p:nvSpPr>
-        <p:spPr>
-          <a:xfrm>
-            <a:off x="4297680" y="2011680"/>
-            <a:ext cx="3474720" cy="3200400"/>
-          </a:xfrm>
-          <a:prstGeom prst="rect">
-            <a:avLst/>
-          </a:prstGeom>
-          <a:noFill/>
-        </p:spPr>
-        <p:txBody>
-          <a:bodyPr wrap="square">
-            <a:spAutoFit/>
-          </a:bodyPr>
-          <a:lstStyle/>
-          <a:p>
-            <a:pPr>
-              <a:spcAft>
-                <a:spcPts val="560"/>
-              </a:spcAft>
-              <a:defRPr sz="1400">
-                <a:solidFill>
-                  <a:srgbClr val="3C3C3C"/>
-                </a:solidFill>
-                <a:latin typeface="Calibri"/>
-              </a:defRPr>
-            </a:pPr>
-            <a:r>
-              <a:t>• PHMB (polyhexanide)</a:t>
-            </a:r>
-          </a:p>
-          <a:p>
-            <a:pPr>
-              <a:spcAft>
-                <a:spcPts val="560"/>
-              </a:spcAft>
-              <a:defRPr sz="1400">
-                <a:solidFill>
-                  <a:srgbClr val="3C3C3C"/>
-                </a:solidFill>
-                <a:latin typeface="Calibri"/>
-              </a:defRPr>
-            </a:pPr>
-            <a:r>
-              <a:t>• Hypochlorous acid (HOCl)</a:t>
-            </a:r>
-          </a:p>
-          <a:p>
-            <a:pPr>
-              <a:spcAft>
-                <a:spcPts val="560"/>
-              </a:spcAft>
-              <a:defRPr sz="1400">
-                <a:solidFill>
-                  <a:srgbClr val="3C3C3C"/>
-                </a:solidFill>
-                <a:latin typeface="Calibri"/>
-              </a:defRPr>
-            </a:pPr>
-            <a:r>
-              <a:t>• Octenidine</a:t>
-            </a:r>
-          </a:p>
-          <a:p>
-            <a:pPr>
-              <a:spcAft>
-                <a:spcPts val="560"/>
-              </a:spcAft>
-              <a:defRPr sz="1400">
-                <a:solidFill>
-                  <a:srgbClr val="3C3C3C"/>
-                </a:solidFill>
-                <a:latin typeface="Calibri"/>
-              </a:defRPr>
-            </a:pPr>
-            <a:r>
-              <a:t>• </a:t>
-            </a:r>
-          </a:p>
-          <a:p>
-            <a:pPr>
-              <a:spcAft>
-                <a:spcPts val="560"/>
-              </a:spcAft>
-              <a:defRPr sz="1400">
-                <a:solidFill>
-                  <a:srgbClr val="3C3C3C"/>
-                </a:solidFill>
-                <a:latin typeface="Calibri"/>
-              </a:defRPr>
-            </a:pPr>
-            <a:r>
-              <a:t>• Modern antiseptics with evidence for safety + efficacy</a:t>
-            </a:r>
-          </a:p>
-          <a:p>
-            <a:pPr>
-              <a:spcAft>
-                <a:spcPts val="560"/>
-              </a:spcAft>
-              <a:defRPr sz="1400">
-                <a:solidFill>
-                  <a:srgbClr val="3C3C3C"/>
-                </a:solidFill>
-                <a:latin typeface="Calibri"/>
-              </a:defRPr>
-            </a:pPr>
-            <a:r>
-              <a:t>• Targeted biofilm disruption</a:t>
-            </a:r>
-          </a:p>
-          <a:p>
-            <a:pPr>
-              <a:spcAft>
-                <a:spcPts val="560"/>
-              </a:spcAft>
-              <a:defRPr sz="1400">
-                <a:solidFill>
-                  <a:srgbClr val="3C3C3C"/>
-                </a:solidFill>
-                <a:latin typeface="Calibri"/>
-              </a:defRPr>
-            </a:pPr>
-            <a:r>
-              <a:t>• Lower cytotoxicity than CHX</a:t>
-            </a:r>
-          </a:p>
-          <a:p>
-            <a:pPr>
-              <a:spcAft>
-                <a:spcPts val="560"/>
-              </a:spcAft>
-              <a:defRPr sz="1400">
-                <a:solidFill>
-                  <a:srgbClr val="3C3C3C"/>
-                </a:solidFill>
-                <a:latin typeface="Calibri"/>
-              </a:defRPr>
-            </a:pPr>
-            <a:r>
-              <a:t>• Use purposefully, not prophylactically</a:t>
-            </a:r>
-          </a:p>
-        </p:txBody>
-      </p:sp>
-      <p:sp>
-        <p:nvSpPr>
-          <p:cNvPr id="7" name="Rounded Rectangle 6"/>
-          <p:cNvSpPr/>
-          <p:nvPr/>
-        </p:nvSpPr>
-        <p:spPr>
-          <a:xfrm>
-            <a:off x="8138160" y="1188720"/>
-            <a:ext cx="3474720" cy="640080"/>
-          </a:xfrm>
-          <a:prstGeom prst="roundRect">
-            <a:avLst/>
-          </a:prstGeom>
-          <a:solidFill>
-            <a:srgbClr val="C83232"/>
-          </a:solidFill>
-          <a:ln>
-            <a:noFill/>
-          </a:ln>
-        </p:spPr>
-        <p:style>
-          <a:lnRef idx="1">
-            <a:schemeClr val="accent1"/>
-          </a:lnRef>
-          <a:fillRef idx="3">
-            <a:schemeClr val="accent1"/>
-          </a:fillRef>
-          <a:effectRef idx="2">
-            <a:schemeClr val="accent1"/>
-          </a:effectRef>
-          <a:fontRef idx="minor">
-            <a:schemeClr val="lt1"/>
-          </a:fontRef>
-        </p:style>
-        <p:txBody>
-          <a:bodyPr rtlCol="0" anchor="ctr" wrap="square"/>
-          <a:lstStyle/>
-          <a:p>
-            <a:pPr algn="ctr">
-              <a:spcBef>
-                <a:spcPts val="0"/>
-              </a:spcBef>
-              <a:spcAft>
-                <a:spcPts val="0"/>
-              </a:spcAft>
-              <a:defRPr sz="1600" b="1">
-                <a:solidFill>
-                  <a:srgbClr val="FFFFFF"/>
-                </a:solidFill>
-                <a:latin typeface="Calibri"/>
-              </a:defRPr>
-            </a:pPr>
-            <a:r>
-              <a:t>🛑  Avoid for Routine Use</a:t>
-            </a:r>
-          </a:p>
-        </p:txBody>
-      </p:sp>
-      <p:sp>
-        <p:nvSpPr>
-          <p:cNvPr id="8" name="TextBox 7"/>
-          <p:cNvSpPr txBox="1"/>
-          <p:nvPr/>
-        </p:nvSpPr>
-        <p:spPr>
-          <a:xfrm>
-            <a:off x="8138160" y="2011680"/>
-            <a:ext cx="3474720" cy="3200400"/>
-          </a:xfrm>
-          <a:prstGeom prst="rect">
-            <a:avLst/>
-          </a:prstGeom>
-          <a:noFill/>
-        </p:spPr>
-        <p:txBody>
-          <a:bodyPr wrap="square">
-            <a:spAutoFit/>
-          </a:bodyPr>
-          <a:lstStyle/>
-          <a:p>
-            <a:pPr>
-              <a:spcAft>
-                <a:spcPts val="560"/>
-              </a:spcAft>
-              <a:defRPr sz="1400">
-                <a:solidFill>
-                  <a:srgbClr val="3C3C3C"/>
-                </a:solidFill>
-                <a:latin typeface="Calibri"/>
-              </a:defRPr>
-            </a:pPr>
-            <a:r>
-              <a:t>• Chlorhexidine</a:t>
-            </a:r>
-          </a:p>
-          <a:p>
-            <a:pPr>
-              <a:spcAft>
-                <a:spcPts val="560"/>
-              </a:spcAft>
-              <a:defRPr sz="1400">
-                <a:solidFill>
-                  <a:srgbClr val="3C3C3C"/>
-                </a:solidFill>
-                <a:latin typeface="Calibri"/>
-              </a:defRPr>
-            </a:pPr>
-            <a:r>
-              <a:t>• Cetrimide</a:t>
-            </a:r>
-          </a:p>
-          <a:p>
-            <a:pPr>
-              <a:spcAft>
-                <a:spcPts val="560"/>
-              </a:spcAft>
-              <a:defRPr sz="1400">
-                <a:solidFill>
-                  <a:srgbClr val="3C3C3C"/>
-                </a:solidFill>
-                <a:latin typeface="Calibri"/>
-              </a:defRPr>
-            </a:pPr>
-            <a:r>
-              <a:t>• Hydrogen peroxide</a:t>
-            </a:r>
-          </a:p>
-          <a:p>
-            <a:pPr>
-              <a:spcAft>
-                <a:spcPts val="560"/>
-              </a:spcAft>
-              <a:defRPr sz="1400">
-                <a:solidFill>
-                  <a:srgbClr val="3C3C3C"/>
-                </a:solidFill>
-                <a:latin typeface="Calibri"/>
-              </a:defRPr>
-            </a:pPr>
-            <a:r>
-              <a:t>• </a:t>
-            </a:r>
-          </a:p>
-          <a:p>
-            <a:pPr>
-              <a:spcAft>
-                <a:spcPts val="560"/>
-              </a:spcAft>
-              <a:defRPr sz="1400">
-                <a:solidFill>
-                  <a:srgbClr val="3C3C3C"/>
-                </a:solidFill>
-                <a:latin typeface="Calibri"/>
-              </a:defRPr>
-            </a:pPr>
-            <a:r>
-              <a:t>• Cytotoxic to healing cells</a:t>
-            </a:r>
-          </a:p>
-          <a:p>
-            <a:pPr>
-              <a:spcAft>
-                <a:spcPts val="560"/>
-              </a:spcAft>
-              <a:defRPr sz="1400">
-                <a:solidFill>
-                  <a:srgbClr val="3C3C3C"/>
-                </a:solidFill>
-                <a:latin typeface="Calibri"/>
-              </a:defRPr>
-            </a:pPr>
-            <a:r>
-              <a:t>• No evidence of benefit in clean wounds</a:t>
-            </a:r>
-          </a:p>
-          <a:p>
-            <a:pPr>
-              <a:spcAft>
-                <a:spcPts val="560"/>
-              </a:spcAft>
-              <a:defRPr sz="1400">
-                <a:solidFill>
-                  <a:srgbClr val="3C3C3C"/>
-                </a:solidFill>
-                <a:latin typeface="Calibri"/>
-              </a:defRPr>
-            </a:pPr>
-            <a:r>
-              <a:t>• Disrupts wound pH</a:t>
-            </a:r>
-          </a:p>
-          <a:p>
-            <a:pPr>
-              <a:spcAft>
-                <a:spcPts val="560"/>
-              </a:spcAft>
-              <a:defRPr sz="1400">
-                <a:solidFill>
-                  <a:srgbClr val="3C3C3C"/>
-                </a:solidFill>
-                <a:latin typeface="Calibri"/>
-              </a:defRPr>
-            </a:pPr>
-            <a:r>
-              <a:t>• Damages granulation tissue</a:t>
-            </a:r>
-          </a:p>
-        </p:txBody>
-      </p:sp>
-      <p:sp>
-        <p:nvSpPr>
-          <p:cNvPr id="9" name="Rounded Rectangle 8"/>
-          <p:cNvSpPr/>
-          <p:nvPr/>
-        </p:nvSpPr>
-        <p:spPr>
-          <a:xfrm>
-            <a:off x="1371600" y="5303520"/>
-            <a:ext cx="9144000" cy="1097280"/>
+            <a:off x="457200" y="3657600"/>
+            <a:ext cx="5303520" cy="2743200"/>
           </a:xfrm>
           <a:prstGeom prst="roundRect">
             <a:avLst/>
@@ -4951,13 +4769,7 @@
           <a:lstStyle/>
           <a:p>
             <a:pPr algn="ctr">
-              <a:spcBef>
-                <a:spcPts val="0"/>
-              </a:spcBef>
-              <a:spcAft>
-                <a:spcPts val="0"/>
-              </a:spcAft>
-              <a:defRPr sz="1600" b="1">
+              <a:defRPr sz="1400" b="0">
                 <a:solidFill>
                   <a:srgbClr val="006464"/>
                 </a:solidFill>
@@ -4965,11 +4777,122 @@
               </a:defRPr>
             </a:pPr>
             <a:r>
-              <a:t>IWII 2025: "Solution selection should align with the wound's infection status"</a:t>
-            </a:r>
-            <a:br/>
-            <a:r>
-              <a:t>Clean wounds → inert solutions  |  Infection/biofilm → targeted modern antiseptics</a:t>
+              <a:t>Why Does Biofilm Matter?</a:t>
+            </a:r>
+            <a:br/>
+            <a:br/>
+            <a:r>
+              <a:t>&gt; Delays wound healing significantly</a:t>
+            </a:r>
+            <a:br/>
+            <a:r>
+              <a:t>&gt; Reforms within 24 hours of disruption</a:t>
+            </a:r>
+            <a:br/>
+            <a:r>
+              <a:t>&gt; Cannot be removed by rinsing alone</a:t>
+            </a:r>
+            <a:br/>
+            <a:r>
+              <a:t>&gt; Requires active mechanical disruption</a:t>
+            </a:r>
+            <a:br/>
+            <a:r>
+              <a:t>   + antimicrobial cleansing</a:t>
+            </a:r>
+            <a:br/>
+            <a:r>
+              <a:t>&gt; CHX is NOT the right tool — modern</a:t>
+            </a:r>
+            <a:br/>
+            <a:r>
+              <a:t>   antiseptics (PHMB, HOCl) are more</a:t>
+            </a:r>
+            <a:br/>
+            <a:r>
+              <a:t>   effective with less tissue damage</a:t>
+            </a:r>
+          </a:p>
+        </p:txBody>
+      </p:sp>
+      <p:sp>
+        <p:nvSpPr>
+          <p:cNvPr id="6" name="Rounded Rectangle 5"/>
+          <p:cNvSpPr/>
+          <p:nvPr/>
+        </p:nvSpPr>
+        <p:spPr>
+          <a:xfrm>
+            <a:off x="6400800" y="3657600"/>
+            <a:ext cx="5029200" cy="2743200"/>
+          </a:xfrm>
+          <a:prstGeom prst="roundRect">
+            <a:avLst/>
+          </a:prstGeom>
+          <a:solidFill>
+            <a:srgbClr val="FFF8E6"/>
+          </a:solidFill>
+          <a:ln>
+            <a:noFill/>
+          </a:ln>
+        </p:spPr>
+        <p:style>
+          <a:lnRef idx="1">
+            <a:schemeClr val="accent1"/>
+          </a:lnRef>
+          <a:fillRef idx="3">
+            <a:schemeClr val="accent1"/>
+          </a:fillRef>
+          <a:effectRef idx="2">
+            <a:schemeClr val="accent1"/>
+          </a:effectRef>
+          <a:fontRef idx="minor">
+            <a:schemeClr val="lt1"/>
+          </a:fontRef>
+        </p:style>
+        <p:txBody>
+          <a:bodyPr rtlCol="0" anchor="ctr" wrap="square"/>
+          <a:lstStyle/>
+          <a:p>
+            <a:pPr algn="ctr">
+              <a:defRPr sz="1400" b="0">
+                <a:solidFill>
+                  <a:srgbClr val="3C3C3C"/>
+                </a:solidFill>
+                <a:latin typeface="Calibri"/>
+              </a:defRPr>
+            </a:pPr>
+            <a:r>
+              <a:t>Clinical Clues — Suspect Biofilm When:</a:t>
+            </a:r>
+            <a:br/>
+            <a:br/>
+            <a:r>
+              <a:t>&gt; Wound has stalled despite appropriate care</a:t>
+            </a:r>
+            <a:br/>
+            <a:r>
+              <a:t>&gt; Slimy or shiny wound bed surface</a:t>
+            </a:r>
+            <a:br/>
+            <a:r>
+              <a:t>&gt; Friable granulation tissue</a:t>
+            </a:r>
+            <a:br/>
+            <a:r>
+              <a:t>&gt; Recurring local infection</a:t>
+            </a:r>
+            <a:br/>
+            <a:r>
+              <a:t>&gt; Wound responds to antimicrobials</a:t>
+            </a:r>
+            <a:br/>
+            <a:r>
+              <a:t>   but relapses when stopped</a:t>
+            </a:r>
+            <a:br/>
+            <a:r>
+              <a:t>&gt; Failed to progress in 2–4 weeks</a:t>
             </a:r>
           </a:p>
         </p:txBody>
@@ -5015,7 +4938,7 @@
             <a:avLst/>
           </a:prstGeom>
           <a:solidFill>
-            <a:srgbClr val="008080"/>
+            <a:srgbClr val="C83232"/>
           </a:solidFill>
           <a:ln>
             <a:noFill/>
@@ -5040,12 +4963,6 @@
           <a:lstStyle/>
           <a:p>
             <a:pPr algn="ctr">
-              <a:spcBef>
-                <a:spcPts val="0"/>
-              </a:spcBef>
-              <a:spcAft>
-                <a:spcPts val="0"/>
-              </a:spcAft>
               <a:defRPr sz="2800" b="1">
                 <a:solidFill>
                   <a:srgbClr val="FFFFFF"/>
@@ -5054,63 +4971,27 @@
               </a:defRPr>
             </a:pPr>
             <a:r>
-              <a:t>Proposed Wound Cleansing Decision Framework</a:t>
-            </a:r>
-          </a:p>
-        </p:txBody>
-      </p:sp>
-      <p:sp>
-        <p:nvSpPr>
-          <p:cNvPr id="3" name="TextBox 2"/>
-          <p:cNvSpPr txBox="1"/>
-          <p:nvPr/>
-        </p:nvSpPr>
-        <p:spPr>
-          <a:xfrm>
-            <a:off x="457200" y="1005840"/>
-            <a:ext cx="10972800" cy="457200"/>
-          </a:xfrm>
-          <a:prstGeom prst="rect">
-            <a:avLst/>
-          </a:prstGeom>
-          <a:noFill/>
-        </p:spPr>
-        <p:txBody>
-          <a:bodyPr wrap="square">
-            <a:spAutoFit/>
-          </a:bodyPr>
-          <a:lstStyle/>
-          <a:p>
-            <a:pPr algn="l">
-              <a:defRPr sz="1400" b="0">
-                <a:solidFill>
-                  <a:srgbClr val="787878"/>
-                </a:solidFill>
-                <a:latin typeface="Calibri"/>
-              </a:defRPr>
-            </a:pPr>
-            <a:r>
-              <a:t>Adapted from the IWII 2025 Wound Cleansing Continuum (p.32)</a:t>
-            </a:r>
-          </a:p>
-        </p:txBody>
-      </p:sp>
-      <p:sp>
-        <p:nvSpPr>
-          <p:cNvPr id="4" name="Rounded Rectangle 3"/>
+              <a:t>The Problem: Chlorhexidine + Cetrimide on Wounds</a:t>
+            </a:r>
+          </a:p>
+        </p:txBody>
+      </p:sp>
+      <p:sp>
+        <p:nvSpPr>
+          <p:cNvPr id="3" name="Rounded Rectangle 2"/>
           <p:cNvSpPr/>
           <p:nvPr/>
         </p:nvSpPr>
         <p:spPr>
           <a:xfrm>
-            <a:off x="457200" y="1645920"/>
-            <a:ext cx="2560320" cy="1371600"/>
+            <a:off x="457200" y="1188720"/>
+            <a:ext cx="3474720" cy="548640"/>
           </a:xfrm>
           <a:prstGeom prst="roundRect">
             <a:avLst/>
           </a:prstGeom>
           <a:solidFill>
-            <a:srgbClr val="008080"/>
+            <a:srgbClr val="006464"/>
           </a:solidFill>
           <a:ln>
             <a:noFill/>
@@ -5135,58 +5016,122 @@
           <a:lstStyle/>
           <a:p>
             <a:pPr algn="ctr">
-              <a:spcBef>
-                <a:spcPts val="0"/>
-              </a:spcBef>
+              <a:defRPr sz="1800" b="1">
+                <a:solidFill>
+                  <a:srgbClr val="FFFFFF"/>
+                </a:solidFill>
+                <a:latin typeface="Calibri"/>
+              </a:defRPr>
+            </a:pPr>
+            <a:r>
+              <a:t>Cytotoxicity Evidence</a:t>
+            </a:r>
+          </a:p>
+        </p:txBody>
+      </p:sp>
+      <p:sp>
+        <p:nvSpPr>
+          <p:cNvPr id="4" name="TextBox 3"/>
+          <p:cNvSpPr txBox="1"/>
+          <p:nvPr/>
+        </p:nvSpPr>
+        <p:spPr>
+          <a:xfrm>
+            <a:off x="457200" y="1920240"/>
+            <a:ext cx="3474720" cy="4114800"/>
+          </a:xfrm>
+          <a:prstGeom prst="rect">
+            <a:avLst/>
+          </a:prstGeom>
+          <a:noFill/>
+        </p:spPr>
+        <p:txBody>
+          <a:bodyPr wrap="square">
+            <a:spAutoFit/>
+          </a:bodyPr>
+          <a:lstStyle/>
+          <a:p>
+            <a:pPr>
               <a:spcAft>
-                <a:spcPts val="0"/>
+                <a:spcPts val="560"/>
               </a:spcAft>
-              <a:defRPr sz="1300" b="1">
-                <a:solidFill>
-                  <a:srgbClr val="FFFFFF"/>
-                </a:solidFill>
-                <a:latin typeface="Calibri"/>
-              </a:defRPr>
-            </a:pPr>
-            <a:r>
-              <a:t>1. ASSESS</a:t>
-            </a:r>
-            <a:br/>
-            <a:br/>
-            <a:r>
-              <a:t>Wound bed</a:t>
-            </a:r>
-            <a:br/>
-            <a:r>
-              <a:t>Wound edges</a:t>
-            </a:r>
-            <a:br/>
-            <a:r>
-              <a:t>Periwound skin</a:t>
-            </a:r>
-            <a:br/>
-            <a:r>
-              <a:t>Signs of infection?</a:t>
-            </a:r>
-          </a:p>
-        </p:txBody>
-      </p:sp>
-      <p:sp>
-        <p:nvSpPr>
-          <p:cNvPr id="5" name="Oval 4"/>
+              <a:defRPr sz="1400">
+                <a:solidFill>
+                  <a:srgbClr val="3C3C3C"/>
+                </a:solidFill>
+                <a:latin typeface="Calibri"/>
+              </a:defRPr>
+            </a:pPr>
+            <a:r>
+              <a:t>• Fibroblasts exposed to 0.05% CHX for 15 mins — non-viable within 24 hours</a:t>
+            </a:r>
+          </a:p>
+          <a:p>
+            <a:pPr>
+              <a:spcAft>
+                <a:spcPts val="560"/>
+              </a:spcAft>
+              <a:defRPr sz="1400">
+                <a:solidFill>
+                  <a:srgbClr val="3C3C3C"/>
+                </a:solidFill>
+                <a:latin typeface="Calibri"/>
+              </a:defRPr>
+            </a:pPr>
+            <a:r>
+              <a:t>• Even at 0.002% CHX suppresses cell division almost completely</a:t>
+            </a:r>
+          </a:p>
+          <a:p>
+            <a:pPr>
+              <a:spcAft>
+                <a:spcPts val="560"/>
+              </a:spcAft>
+              <a:defRPr sz="1400">
+                <a:solidFill>
+                  <a:srgbClr val="3C3C3C"/>
+                </a:solidFill>
+                <a:latin typeface="Calibri"/>
+              </a:defRPr>
+            </a:pPr>
+            <a:r>
+              <a:t>• Cetrimide adds further cytotoxic burden — disrupts cell membranes</a:t>
+            </a:r>
+          </a:p>
+          <a:p>
+            <a:pPr>
+              <a:spcAft>
+                <a:spcPts val="560"/>
+              </a:spcAft>
+              <a:defRPr sz="1400">
+                <a:solidFill>
+                  <a:srgbClr val="3C3C3C"/>
+                </a:solidFill>
+                <a:latin typeface="Calibri"/>
+              </a:defRPr>
+            </a:pPr>
+            <a:r>
+              <a:t>• Dose- and time-dependent damage to the very cells that heal wounds</a:t>
+            </a:r>
+          </a:p>
+        </p:txBody>
+      </p:sp>
+      <p:sp>
+        <p:nvSpPr>
+          <p:cNvPr id="5" name="Rounded Rectangle 4"/>
           <p:cNvSpPr/>
           <p:nvPr/>
         </p:nvSpPr>
         <p:spPr>
           <a:xfrm>
-            <a:off x="3200400" y="2011680"/>
-            <a:ext cx="548640" cy="548640"/>
-          </a:xfrm>
-          <a:prstGeom prst="ellipse">
+            <a:off x="4297680" y="1188720"/>
+            <a:ext cx="3474720" cy="548640"/>
+          </a:xfrm>
+          <a:prstGeom prst="roundRect">
             <a:avLst/>
           </a:prstGeom>
           <a:solidFill>
-            <a:srgbClr val="FFFFFF"/>
+            <a:srgbClr val="C83232"/>
           </a:solidFill>
           <a:ln>
             <a:noFill/>
@@ -5211,35 +5156,116 @@
           <a:lstStyle/>
           <a:p>
             <a:pPr algn="ctr">
-              <a:spcBef>
-                <a:spcPts val="0"/>
-              </a:spcBef>
+              <a:defRPr sz="1800" b="1">
+                <a:solidFill>
+                  <a:srgbClr val="FFFFFF"/>
+                </a:solidFill>
+                <a:latin typeface="Calibri"/>
+              </a:defRPr>
+            </a:pPr>
+            <a:r>
+              <a:t>What Gets Damaged?</a:t>
+            </a:r>
+          </a:p>
+        </p:txBody>
+      </p:sp>
+      <p:sp>
+        <p:nvSpPr>
+          <p:cNvPr id="6" name="TextBox 5"/>
+          <p:cNvSpPr txBox="1"/>
+          <p:nvPr/>
+        </p:nvSpPr>
+        <p:spPr>
+          <a:xfrm>
+            <a:off x="4297680" y="1920240"/>
+            <a:ext cx="3474720" cy="4114800"/>
+          </a:xfrm>
+          <a:prstGeom prst="rect">
+            <a:avLst/>
+          </a:prstGeom>
+          <a:noFill/>
+        </p:spPr>
+        <p:txBody>
+          <a:bodyPr wrap="square">
+            <a:spAutoFit/>
+          </a:bodyPr>
+          <a:lstStyle/>
+          <a:p>
+            <a:pPr>
               <a:spcAft>
-                <a:spcPts val="0"/>
+                <a:spcPts val="560"/>
               </a:spcAft>
-              <a:defRPr sz="2400" b="1">
-                <a:solidFill>
-                  <a:srgbClr val="008080"/>
-                </a:solidFill>
-                <a:latin typeface="Calibri"/>
-              </a:defRPr>
-            </a:pPr>
-            <a:r>
-              <a:t>→</a:t>
-            </a:r>
-          </a:p>
-        </p:txBody>
-      </p:sp>
-      <p:sp>
-        <p:nvSpPr>
-          <p:cNvPr id="6" name="Rounded Rectangle 5"/>
+              <a:defRPr sz="1400">
+                <a:solidFill>
+                  <a:srgbClr val="3C3C3C"/>
+                </a:solidFill>
+                <a:latin typeface="Calibri"/>
+              </a:defRPr>
+            </a:pPr>
+            <a:r>
+              <a:t>• Fibroblasts — produce collagen and extracellular matrix for wound repair</a:t>
+            </a:r>
+          </a:p>
+          <a:p>
+            <a:pPr>
+              <a:spcAft>
+                <a:spcPts val="560"/>
+              </a:spcAft>
+              <a:defRPr sz="1400">
+                <a:solidFill>
+                  <a:srgbClr val="3C3C3C"/>
+                </a:solidFill>
+                <a:latin typeface="Calibri"/>
+              </a:defRPr>
+            </a:pPr>
+            <a:r>
+              <a:t>• Keratinocytes — drive re-epithelialisation and wound closure</a:t>
+            </a:r>
+          </a:p>
+          <a:p>
+            <a:pPr>
+              <a:spcAft>
+                <a:spcPts val="560"/>
+              </a:spcAft>
+              <a:defRPr sz="1400">
+                <a:solidFill>
+                  <a:srgbClr val="3C3C3C"/>
+                </a:solidFill>
+                <a:latin typeface="Calibri"/>
+              </a:defRPr>
+            </a:pPr>
+            <a:r>
+              <a:t>• Growth factors — disrupted signalling cascades</a:t>
+            </a:r>
+          </a:p>
+          <a:p>
+            <a:pPr>
+              <a:spcAft>
+                <a:spcPts val="560"/>
+              </a:spcAft>
+              <a:defRPr sz="1400">
+                <a:solidFill>
+                  <a:srgbClr val="3C3C3C"/>
+                </a:solidFill>
+                <a:latin typeface="Calibri"/>
+              </a:defRPr>
+            </a:pPr>
+            <a:r>
+              <a:t>• Granulation tissue — the foundation of healing</a:t>
+            </a:r>
+          </a:p>
+        </p:txBody>
+      </p:sp>
+      <p:sp>
+        <p:nvSpPr>
+          <p:cNvPr id="7" name="Rounded Rectangle 6"/>
           <p:cNvSpPr/>
           <p:nvPr/>
         </p:nvSpPr>
         <p:spPr>
           <a:xfrm>
-            <a:off x="3931920" y="1645920"/>
-            <a:ext cx="2560320" cy="1371600"/>
+            <a:off x="8138160" y="1188720"/>
+            <a:ext cx="3474720" cy="548640"/>
           </a:xfrm>
           <a:prstGeom prst="roundRect">
             <a:avLst/>
@@ -5270,58 +5296,122 @@
           <a:lstStyle/>
           <a:p>
             <a:pPr algn="ctr">
-              <a:spcBef>
-                <a:spcPts val="0"/>
-              </a:spcBef>
+              <a:defRPr sz="1800" b="1">
+                <a:solidFill>
+                  <a:srgbClr val="FFFFFF"/>
+                </a:solidFill>
+                <a:latin typeface="Calibri"/>
+              </a:defRPr>
+            </a:pPr>
+            <a:r>
+              <a:t>Clinical Impact</a:t>
+            </a:r>
+          </a:p>
+        </p:txBody>
+      </p:sp>
+      <p:sp>
+        <p:nvSpPr>
+          <p:cNvPr id="8" name="TextBox 7"/>
+          <p:cNvSpPr txBox="1"/>
+          <p:nvPr/>
+        </p:nvSpPr>
+        <p:spPr>
+          <a:xfrm>
+            <a:off x="8138160" y="1920240"/>
+            <a:ext cx="3474720" cy="4114800"/>
+          </a:xfrm>
+          <a:prstGeom prst="rect">
+            <a:avLst/>
+          </a:prstGeom>
+          <a:noFill/>
+        </p:spPr>
+        <p:txBody>
+          <a:bodyPr wrap="square">
+            <a:spAutoFit/>
+          </a:bodyPr>
+          <a:lstStyle/>
+          <a:p>
+            <a:pPr>
               <a:spcAft>
-                <a:spcPts val="0"/>
+                <a:spcPts val="560"/>
               </a:spcAft>
-              <a:defRPr sz="1300" b="1">
-                <a:solidFill>
-                  <a:srgbClr val="FFFFFF"/>
-                </a:solidFill>
-                <a:latin typeface="Calibri"/>
-              </a:defRPr>
-            </a:pPr>
-            <a:r>
-              <a:t>2. DECIDE</a:t>
-            </a:r>
-            <a:br/>
-            <a:br/>
-            <a:r>
-              <a:t>Bacterial balance?</a:t>
-            </a:r>
-            <a:br/>
-            <a:r>
-              <a:t>Biofilm suspected?</a:t>
-            </a:r>
-            <a:br/>
-            <a:r>
-              <a:t>Critically colonised?</a:t>
-            </a:r>
-            <a:br/>
-            <a:r>
-              <a:t>Infected?</a:t>
-            </a:r>
-          </a:p>
-        </p:txBody>
-      </p:sp>
-      <p:sp>
-        <p:nvSpPr>
-          <p:cNvPr id="7" name="Oval 6"/>
+              <a:defRPr sz="1400">
+                <a:solidFill>
+                  <a:srgbClr val="3C3C3C"/>
+                </a:solidFill>
+                <a:latin typeface="Calibri"/>
+              </a:defRPr>
+            </a:pPr>
+            <a:r>
+              <a:t>• Delayed wound healing — more visits, more costs, more patient burden</a:t>
+            </a:r>
+          </a:p>
+          <a:p>
+            <a:pPr>
+              <a:spcAft>
+                <a:spcPts val="560"/>
+              </a:spcAft>
+              <a:defRPr sz="1400">
+                <a:solidFill>
+                  <a:srgbClr val="3C3C3C"/>
+                </a:solidFill>
+                <a:latin typeface="Calibri"/>
+              </a:defRPr>
+            </a:pPr>
+            <a:r>
+              <a:t>• No evidence of benefit for routine use on non-infected wounds</a:t>
+            </a:r>
+          </a:p>
+          <a:p>
+            <a:pPr>
+              <a:spcAft>
+                <a:spcPts val="560"/>
+              </a:spcAft>
+              <a:defRPr sz="1400">
+                <a:solidFill>
+                  <a:srgbClr val="3C3C3C"/>
+                </a:solidFill>
+                <a:latin typeface="Calibri"/>
+              </a:defRPr>
+            </a:pPr>
+            <a:r>
+              <a:t>• CHX group showed more days to healing vs saline in comparative studies</a:t>
+            </a:r>
+          </a:p>
+          <a:p>
+            <a:pPr>
+              <a:spcAft>
+                <a:spcPts val="560"/>
+              </a:spcAft>
+              <a:defRPr sz="1400">
+                <a:solidFill>
+                  <a:srgbClr val="3C3C3C"/>
+                </a:solidFill>
+                <a:latin typeface="Calibri"/>
+              </a:defRPr>
+            </a:pPr>
+            <a:r>
+              <a:t>• We may be undoing our good wound management with every dressing change</a:t>
+            </a:r>
+          </a:p>
+        </p:txBody>
+      </p:sp>
+      <p:sp>
+        <p:nvSpPr>
+          <p:cNvPr id="9" name="Rounded Rectangle 8"/>
           <p:cNvSpPr/>
           <p:nvPr/>
         </p:nvSpPr>
         <p:spPr>
           <a:xfrm>
-            <a:off x="6675120" y="2011680"/>
-            <a:ext cx="548640" cy="548640"/>
-          </a:xfrm>
-          <a:prstGeom prst="ellipse">
+            <a:off x="1371600" y="5303520"/>
+            <a:ext cx="9144000" cy="1097280"/>
+          </a:xfrm>
+          <a:prstGeom prst="roundRect">
             <a:avLst/>
           </a:prstGeom>
           <a:solidFill>
-            <a:srgbClr val="FFFFFF"/>
+            <a:srgbClr val="FFF0F0"/>
           </a:solidFill>
           <a:ln>
             <a:noFill/>
@@ -5346,443 +5436,7 @@
           <a:lstStyle/>
           <a:p>
             <a:pPr algn="ctr">
-              <a:spcBef>
-                <a:spcPts val="0"/>
-              </a:spcBef>
-              <a:spcAft>
-                <a:spcPts val="0"/>
-              </a:spcAft>
-              <a:defRPr sz="2400" b="1">
-                <a:solidFill>
-                  <a:srgbClr val="008080"/>
-                </a:solidFill>
-                <a:latin typeface="Calibri"/>
-              </a:defRPr>
-            </a:pPr>
-            <a:r>
-              <a:t>→</a:t>
-            </a:r>
-          </a:p>
-        </p:txBody>
-      </p:sp>
-      <p:sp>
-        <p:nvSpPr>
-          <p:cNvPr id="8" name="Rounded Rectangle 7"/>
-          <p:cNvSpPr/>
-          <p:nvPr/>
-        </p:nvSpPr>
-        <p:spPr>
-          <a:xfrm>
-            <a:off x="7406640" y="1645920"/>
-            <a:ext cx="2560320" cy="1371600"/>
-          </a:xfrm>
-          <a:prstGeom prst="roundRect">
-            <a:avLst/>
-          </a:prstGeom>
-          <a:solidFill>
-            <a:srgbClr val="28A050"/>
-          </a:solidFill>
-          <a:ln>
-            <a:noFill/>
-          </a:ln>
-        </p:spPr>
-        <p:style>
-          <a:lnRef idx="1">
-            <a:schemeClr val="accent1"/>
-          </a:lnRef>
-          <a:fillRef idx="3">
-            <a:schemeClr val="accent1"/>
-          </a:fillRef>
-          <a:effectRef idx="2">
-            <a:schemeClr val="accent1"/>
-          </a:effectRef>
-          <a:fontRef idx="minor">
-            <a:schemeClr val="lt1"/>
-          </a:fontRef>
-        </p:style>
-        <p:txBody>
-          <a:bodyPr rtlCol="0" anchor="ctr" wrap="square"/>
-          <a:lstStyle/>
-          <a:p>
-            <a:pPr algn="ctr">
-              <a:spcBef>
-                <a:spcPts val="0"/>
-              </a:spcBef>
-              <a:spcAft>
-                <a:spcPts val="0"/>
-              </a:spcAft>
-              <a:defRPr sz="1300" b="1">
-                <a:solidFill>
-                  <a:srgbClr val="FFFFFF"/>
-                </a:solidFill>
-                <a:latin typeface="Calibri"/>
-              </a:defRPr>
-            </a:pPr>
-            <a:r>
-              <a:t>3. SELECT</a:t>
-            </a:r>
-            <a:br/>
-            <a:br/>
-            <a:r>
-              <a:t>Solution</a:t>
-            </a:r>
-            <a:br/>
-            <a:r>
-              <a:t>Technique</a:t>
-            </a:r>
-            <a:br/>
-            <a:r>
-              <a:t>Pressure</a:t>
-            </a:r>
-            <a:br/>
-            <a:r>
-              <a:t>Frequency</a:t>
-            </a:r>
-          </a:p>
-        </p:txBody>
-      </p:sp>
-      <p:sp>
-        <p:nvSpPr>
-          <p:cNvPr id="9" name="Oval 8"/>
-          <p:cNvSpPr/>
-          <p:nvPr/>
-        </p:nvSpPr>
-        <p:spPr>
-          <a:xfrm>
-            <a:off x="10149840" y="2011680"/>
-            <a:ext cx="548640" cy="548640"/>
-          </a:xfrm>
-          <a:prstGeom prst="ellipse">
-            <a:avLst/>
-          </a:prstGeom>
-          <a:solidFill>
-            <a:srgbClr val="FFFFFF"/>
-          </a:solidFill>
-          <a:ln>
-            <a:noFill/>
-          </a:ln>
-        </p:spPr>
-        <p:style>
-          <a:lnRef idx="1">
-            <a:schemeClr val="accent1"/>
-          </a:lnRef>
-          <a:fillRef idx="3">
-            <a:schemeClr val="accent1"/>
-          </a:fillRef>
-          <a:effectRef idx="2">
-            <a:schemeClr val="accent1"/>
-          </a:effectRef>
-          <a:fontRef idx="minor">
-            <a:schemeClr val="lt1"/>
-          </a:fontRef>
-        </p:style>
-        <p:txBody>
-          <a:bodyPr rtlCol="0" anchor="ctr" wrap="square"/>
-          <a:lstStyle/>
-          <a:p>
-            <a:pPr algn="ctr">
-              <a:spcBef>
-                <a:spcPts val="0"/>
-              </a:spcBef>
-              <a:spcAft>
-                <a:spcPts val="0"/>
-              </a:spcAft>
-              <a:defRPr sz="2400" b="1">
-                <a:solidFill>
-                  <a:srgbClr val="008080"/>
-                </a:solidFill>
-                <a:latin typeface="Calibri"/>
-              </a:defRPr>
-            </a:pPr>
-            <a:r>
-              <a:t>→</a:t>
-            </a:r>
-          </a:p>
-        </p:txBody>
-      </p:sp>
-      <p:sp>
-        <p:nvSpPr>
-          <p:cNvPr id="10" name="Rounded Rectangle 9"/>
-          <p:cNvSpPr/>
-          <p:nvPr/>
-        </p:nvSpPr>
-        <p:spPr>
-          <a:xfrm>
-            <a:off x="10881360" y="1645920"/>
-            <a:ext cx="1097280" cy="1371600"/>
-          </a:xfrm>
-          <a:prstGeom prst="roundRect">
-            <a:avLst/>
-          </a:prstGeom>
-          <a:solidFill>
-            <a:srgbClr val="006464"/>
-          </a:solidFill>
-          <a:ln>
-            <a:noFill/>
-          </a:ln>
-        </p:spPr>
-        <p:style>
-          <a:lnRef idx="1">
-            <a:schemeClr val="accent1"/>
-          </a:lnRef>
-          <a:fillRef idx="3">
-            <a:schemeClr val="accent1"/>
-          </a:fillRef>
-          <a:effectRef idx="2">
-            <a:schemeClr val="accent1"/>
-          </a:effectRef>
-          <a:fontRef idx="minor">
-            <a:schemeClr val="lt1"/>
-          </a:fontRef>
-        </p:style>
-        <p:txBody>
-          <a:bodyPr rtlCol="0" anchor="ctr" wrap="square"/>
-          <a:lstStyle/>
-          <a:p>
-            <a:pPr algn="ctr">
-              <a:spcBef>
-                <a:spcPts val="0"/>
-              </a:spcBef>
-              <a:spcAft>
-                <a:spcPts val="0"/>
-              </a:spcAft>
-              <a:defRPr sz="1200" b="1">
-                <a:solidFill>
-                  <a:srgbClr val="FFFFFF"/>
-                </a:solidFill>
-                <a:latin typeface="Calibri"/>
-              </a:defRPr>
-            </a:pPr>
-            <a:r>
-              <a:t>4.</a:t>
-            </a:r>
-            <a:br/>
-            <a:r>
-              <a:t>EVALUATE</a:t>
-            </a:r>
-            <a:br/>
-            <a:br/>
-            <a:r>
-              <a:t>Is it</a:t>
-            </a:r>
-            <a:br/>
-            <a:r>
-              <a:t>working?</a:t>
-            </a:r>
-          </a:p>
-        </p:txBody>
-      </p:sp>
-      <p:sp>
-        <p:nvSpPr>
-          <p:cNvPr id="11" name="Rounded Rectangle 10"/>
-          <p:cNvSpPr/>
-          <p:nvPr/>
-        </p:nvSpPr>
-        <p:spPr>
-          <a:xfrm>
-            <a:off x="457200" y="3474720"/>
-            <a:ext cx="3657600" cy="2560320"/>
-          </a:xfrm>
-          <a:prstGeom prst="roundRect">
-            <a:avLst/>
-          </a:prstGeom>
-          <a:solidFill>
-            <a:srgbClr val="DCF5F5"/>
-          </a:solidFill>
-          <a:ln>
-            <a:noFill/>
-          </a:ln>
-        </p:spPr>
-        <p:style>
-          <a:lnRef idx="1">
-            <a:schemeClr val="accent1"/>
-          </a:lnRef>
-          <a:fillRef idx="3">
-            <a:schemeClr val="accent1"/>
-          </a:fillRef>
-          <a:effectRef idx="2">
-            <a:schemeClr val="accent1"/>
-          </a:effectRef>
-          <a:fontRef idx="minor">
-            <a:schemeClr val="lt1"/>
-          </a:fontRef>
-        </p:style>
-        <p:txBody>
-          <a:bodyPr rtlCol="0" anchor="ctr" wrap="square"/>
-          <a:lstStyle/>
-          <a:p>
-            <a:pPr algn="ctr">
-              <a:spcBef>
-                <a:spcPts val="0"/>
-              </a:spcBef>
-              <a:spcAft>
-                <a:spcPts val="0"/>
-              </a:spcAft>
-              <a:defRPr sz="1300" b="0">
-                <a:solidFill>
-                  <a:srgbClr val="006464"/>
-                </a:solidFill>
-                <a:latin typeface="Calibri"/>
-              </a:defRPr>
-            </a:pPr>
-            <a:r>
-              <a:t>Bacterial Balance</a:t>
-            </a:r>
-            <a:br/>
-            <a:r>
-              <a:t>(Most of our wounds)</a:t>
-            </a:r>
-            <a:br/>
-            <a:br/>
-            <a:r>
-              <a:t>→ Normal saline or potable water</a:t>
-            </a:r>
-            <a:br/>
-            <a:r>
-              <a:t>→ Gentle irrigation</a:t>
-            </a:r>
-            <a:br/>
-            <a:r>
-              <a:t>→ Cleanse wound bed, edges</a:t>
-            </a:r>
-            <a:br/>
-            <a:r>
-              <a:t>   &amp; periwound</a:t>
-            </a:r>
-            <a:br/>
-            <a:r>
-              <a:t>→ Reassess at each visit</a:t>
-            </a:r>
-          </a:p>
-        </p:txBody>
-      </p:sp>
-      <p:sp>
-        <p:nvSpPr>
-          <p:cNvPr id="12" name="Rounded Rectangle 11"/>
-          <p:cNvSpPr/>
-          <p:nvPr/>
-        </p:nvSpPr>
-        <p:spPr>
-          <a:xfrm>
-            <a:off x="4389120" y="3474720"/>
-            <a:ext cx="3657600" cy="2560320"/>
-          </a:xfrm>
-          <a:prstGeom prst="roundRect">
-            <a:avLst/>
-          </a:prstGeom>
-          <a:solidFill>
-            <a:srgbClr val="FFF8E6"/>
-          </a:solidFill>
-          <a:ln>
-            <a:noFill/>
-          </a:ln>
-        </p:spPr>
-        <p:style>
-          <a:lnRef idx="1">
-            <a:schemeClr val="accent1"/>
-          </a:lnRef>
-          <a:fillRef idx="3">
-            <a:schemeClr val="accent1"/>
-          </a:fillRef>
-          <a:effectRef idx="2">
-            <a:schemeClr val="accent1"/>
-          </a:effectRef>
-          <a:fontRef idx="minor">
-            <a:schemeClr val="lt1"/>
-          </a:fontRef>
-        </p:style>
-        <p:txBody>
-          <a:bodyPr rtlCol="0" anchor="ctr" wrap="square"/>
-          <a:lstStyle/>
-          <a:p>
-            <a:pPr algn="ctr">
-              <a:spcBef>
-                <a:spcPts val="0"/>
-              </a:spcBef>
-              <a:spcAft>
-                <a:spcPts val="0"/>
-              </a:spcAft>
-              <a:defRPr sz="1300" b="0">
-                <a:solidFill>
-                  <a:srgbClr val="3C3C3C"/>
-                </a:solidFill>
-                <a:latin typeface="Calibri"/>
-              </a:defRPr>
-            </a:pPr>
-            <a:r>
-              <a:t>Biofilm Suspected / At Risk</a:t>
-            </a:r>
-            <a:br/>
-            <a:br/>
-            <a:r>
-              <a:t>→ Consider surfactant-based or</a:t>
-            </a:r>
-            <a:br/>
-            <a:r>
-              <a:t>   antimicrobial cleanser</a:t>
-            </a:r>
-            <a:br/>
-            <a:r>
-              <a:t>→ PHMB, HOCl or Octenidine</a:t>
-            </a:r>
-            <a:br/>
-            <a:r>
-              <a:t>→ Active mechanical cleansing</a:t>
-            </a:r>
-            <a:br/>
-            <a:r>
-              <a:t>→ Treat the cause, not routine</a:t>
-            </a:r>
-          </a:p>
-        </p:txBody>
-      </p:sp>
-      <p:sp>
-        <p:nvSpPr>
-          <p:cNvPr id="13" name="Rounded Rectangle 12"/>
-          <p:cNvSpPr/>
-          <p:nvPr/>
-        </p:nvSpPr>
-        <p:spPr>
-          <a:xfrm>
-            <a:off x="8321040" y="3474720"/>
-            <a:ext cx="3657600" cy="2560320"/>
-          </a:xfrm>
-          <a:prstGeom prst="roundRect">
-            <a:avLst/>
-          </a:prstGeom>
-          <a:solidFill>
-            <a:srgbClr val="FFEBEB"/>
-          </a:solidFill>
-          <a:ln>
-            <a:noFill/>
-          </a:ln>
-        </p:spPr>
-        <p:style>
-          <a:lnRef idx="1">
-            <a:schemeClr val="accent1"/>
-          </a:lnRef>
-          <a:fillRef idx="3">
-            <a:schemeClr val="accent1"/>
-          </a:fillRef>
-          <a:effectRef idx="2">
-            <a:schemeClr val="accent1"/>
-          </a:effectRef>
-          <a:fontRef idx="minor">
-            <a:schemeClr val="lt1"/>
-          </a:fontRef>
-        </p:style>
-        <p:txBody>
-          <a:bodyPr rtlCol="0" anchor="ctr" wrap="square"/>
-          <a:lstStyle/>
-          <a:p>
-            <a:pPr algn="ctr">
-              <a:spcBef>
-                <a:spcPts val="0"/>
-              </a:spcBef>
-              <a:spcAft>
-                <a:spcPts val="0"/>
-              </a:spcAft>
-              <a:defRPr sz="1300" b="0">
+              <a:defRPr sz="1600" b="0">
                 <a:solidFill>
                   <a:srgbClr val="C83232"/>
                 </a:solidFill>
@@ -5790,32 +5444,11 @@
               </a:defRPr>
             </a:pPr>
             <a:r>
-              <a:t>Infected Wound</a:t>
-            </a:r>
-            <a:br/>
-            <a:br/>
-            <a:r>
-              <a:t>→ Antimicrobial cleanser +</a:t>
-            </a:r>
-            <a:br/>
-            <a:r>
-              <a:t>   systemic treatment as needed</a:t>
-            </a:r>
-            <a:br/>
-            <a:r>
-              <a:t>→ Discuss with GP</a:t>
-            </a:r>
-            <a:br/>
-            <a:r>
-              <a:t>→ Swab if clinically indicated</a:t>
-            </a:r>
-            <a:br/>
-            <a:r>
-              <a:t>→ Short-term targeted antiseptic</a:t>
-            </a:r>
-            <a:br/>
-            <a:r>
-              <a:t>→ Step down when resolving</a:t>
+              <a:t>"Antiseptics should not be used routinely on wounds that are healing normally"</a:t>
+            </a:r>
+            <a:br/>
+            <a:r>
+              <a:t>— Consistent finding across wound care literature</a:t>
             </a:r>
           </a:p>
         </p:txBody>
@@ -5886,12 +5519,6 @@
           <a:lstStyle/>
           <a:p>
             <a:pPr algn="ctr">
-              <a:spcBef>
-                <a:spcPts val="0"/>
-              </a:spcBef>
-              <a:spcAft>
-                <a:spcPts val="0"/>
-              </a:spcAft>
               <a:defRPr sz="2800" b="1">
                 <a:solidFill>
                   <a:srgbClr val="FFFFFF"/>
@@ -5900,21 +5527,74 @@
               </a:defRPr>
             </a:pPr>
             <a:r>
-              <a:t>What I'm Proposing We Consider</a:t>
-            </a:r>
-          </a:p>
-        </p:txBody>
-      </p:sp>
-      <p:sp>
-        <p:nvSpPr>
-          <p:cNvPr id="3" name="TextBox 2"/>
+              <a:t>What Should We Use? — IWII 2025 Guidance</a:t>
+            </a:r>
+          </a:p>
+        </p:txBody>
+      </p:sp>
+      <p:sp>
+        <p:nvSpPr>
+          <p:cNvPr id="3" name="Rounded Rectangle 2"/>
+          <p:cNvSpPr/>
+          <p:nvPr/>
+        </p:nvSpPr>
+        <p:spPr>
+          <a:xfrm>
+            <a:off x="457200" y="1188720"/>
+            <a:ext cx="3474720" cy="640080"/>
+          </a:xfrm>
+          <a:prstGeom prst="roundRect">
+            <a:avLst/>
+          </a:prstGeom>
+          <a:solidFill>
+            <a:srgbClr val="28A050"/>
+          </a:solidFill>
+          <a:ln>
+            <a:noFill/>
+          </a:ln>
+        </p:spPr>
+        <p:style>
+          <a:lnRef idx="1">
+            <a:schemeClr val="accent1"/>
+          </a:lnRef>
+          <a:fillRef idx="3">
+            <a:schemeClr val="accent1"/>
+          </a:fillRef>
+          <a:effectRef idx="2">
+            <a:schemeClr val="accent1"/>
+          </a:effectRef>
+          <a:fontRef idx="minor">
+            <a:schemeClr val="lt1"/>
+          </a:fontRef>
+        </p:style>
+        <p:txBody>
+          <a:bodyPr rtlCol="0" anchor="ctr" wrap="square"/>
+          <a:lstStyle/>
+          <a:p>
+            <a:pPr algn="ctr">
+              <a:defRPr sz="1600" b="1">
+                <a:solidFill>
+                  <a:srgbClr val="FFFFFF"/>
+                </a:solidFill>
+                <a:latin typeface="Calibri"/>
+              </a:defRPr>
+            </a:pPr>
+            <a:r>
+              <a:t>Clean / Healing Wounds</a:t>
+            </a:r>
+          </a:p>
+        </p:txBody>
+      </p:sp>
+      <p:sp>
+        <p:nvSpPr>
+          <p:cNvPr id="4" name="TextBox 3"/>
           <p:cNvSpPr txBox="1"/>
           <p:nvPr/>
         </p:nvSpPr>
         <p:spPr>
           <a:xfrm>
-            <a:off x="731520" y="1188720"/>
-            <a:ext cx="5029200" cy="5029200"/>
+            <a:off x="457200" y="2011680"/>
+            <a:ext cx="3474720" cy="3200400"/>
           </a:xfrm>
           <a:prstGeom prst="rect">
             <a:avLst/>
@@ -5929,9 +5609,9 @@
           <a:p>
             <a:pPr>
               <a:spcAft>
-                <a:spcPts val="640"/>
+                <a:spcPts val="560"/>
               </a:spcAft>
-              <a:defRPr sz="1600" b="1">
+              <a:defRPr sz="1400">
                 <a:solidFill>
                   <a:srgbClr val="3C3C3C"/>
                 </a:solidFill>
@@ -5939,15 +5619,15 @@
               </a:defRPr>
             </a:pPr>
             <a:r>
-              <a:t>• Immediate — Wound Cleansing</a:t>
+              <a:t>• Normal saline (0.9% NaCl)</a:t>
             </a:r>
           </a:p>
           <a:p>
             <a:pPr>
               <a:spcAft>
-                <a:spcPts val="640"/>
+                <a:spcPts val="560"/>
               </a:spcAft>
-              <a:defRPr sz="1600">
+              <a:defRPr sz="1400">
                 <a:solidFill>
                   <a:srgbClr val="3C3C3C"/>
                 </a:solidFill>
@@ -5955,15 +5635,15 @@
               </a:defRPr>
             </a:pPr>
             <a:r>
-              <a:t>• </a:t>
+              <a:t>• Potable/tap water</a:t>
             </a:r>
           </a:p>
           <a:p>
             <a:pPr>
               <a:spcAft>
-                <a:spcPts val="640"/>
+                <a:spcPts val="560"/>
               </a:spcAft>
-              <a:defRPr sz="1600">
+              <a:defRPr sz="1400">
                 <a:solidFill>
                   <a:srgbClr val="3C3C3C"/>
                 </a:solidFill>
@@ -5971,31 +5651,28 @@
               </a:defRPr>
             </a:pPr>
             <a:r>
-              <a:t>• Switch routine wound cleansing to normal saline or potable water for non-infected wounds</a:t>
+              <a:t>• Sterile water</a:t>
             </a:r>
           </a:p>
           <a:p>
             <a:pPr>
               <a:spcAft>
-                <a:spcPts val="640"/>
+                <a:spcPts val="560"/>
               </a:spcAft>
-              <a:defRPr sz="1600">
+              <a:defRPr sz="1400">
                 <a:solidFill>
                   <a:srgbClr val="3C3C3C"/>
                 </a:solidFill>
                 <a:latin typeface="Calibri"/>
               </a:defRPr>
             </a:pPr>
-            <a:r>
-              <a:t>• Reserve antiseptics (PHMB, HOCl) for wounds with suspected infection or biofilm</a:t>
-            </a:r>
           </a:p>
           <a:p>
             <a:pPr>
               <a:spcAft>
-                <a:spcPts val="640"/>
+                <a:spcPts val="560"/>
               </a:spcAft>
-              <a:defRPr sz="1600">
+              <a:defRPr sz="1400">
                 <a:solidFill>
                   <a:srgbClr val="3C3C3C"/>
                 </a:solidFill>
@@ -6003,15 +5680,15 @@
               </a:defRPr>
             </a:pPr>
             <a:r>
-              <a:t>• Stop routine chlorhexidine + cetrimide use on healing wounds</a:t>
+              <a:t>• Non-cytotoxic, non-allergenic</a:t>
             </a:r>
           </a:p>
           <a:p>
             <a:pPr>
               <a:spcAft>
-                <a:spcPts val="640"/>
+                <a:spcPts val="560"/>
               </a:spcAft>
-              <a:defRPr sz="1600">
+              <a:defRPr sz="1400">
                 <a:solidFill>
                   <a:srgbClr val="3C3C3C"/>
                 </a:solidFill>
@@ -6019,21 +5696,106 @@
               </a:defRPr>
             </a:pPr>
             <a:r>
-              <a:t>• Adopt a cleansing decision framework based on wound status (adapted from IWII 2025)</a:t>
-            </a:r>
-          </a:p>
-        </p:txBody>
-      </p:sp>
-      <p:sp>
-        <p:nvSpPr>
-          <p:cNvPr id="4" name="TextBox 3"/>
+              <a:t>• Supports the healing environment</a:t>
+            </a:r>
+          </a:p>
+          <a:p>
+            <a:pPr>
+              <a:spcAft>
+                <a:spcPts val="560"/>
+              </a:spcAft>
+              <a:defRPr sz="1400">
+                <a:solidFill>
+                  <a:srgbClr val="3C3C3C"/>
+                </a:solidFill>
+                <a:latin typeface="Calibri"/>
+              </a:defRPr>
+            </a:pPr>
+            <a:r>
+              <a:t>• Maintains optimal wound pH (4-5.5)</a:t>
+            </a:r>
+          </a:p>
+          <a:p>
+            <a:pPr>
+              <a:spcAft>
+                <a:spcPts val="560"/>
+              </a:spcAft>
+              <a:defRPr sz="1400">
+                <a:solidFill>
+                  <a:srgbClr val="3C3C3C"/>
+                </a:solidFill>
+                <a:latin typeface="Calibri"/>
+              </a:defRPr>
+            </a:pPr>
+            <a:r>
+              <a:t>• This covers MOST of our wounds</a:t>
+            </a:r>
+          </a:p>
+        </p:txBody>
+      </p:sp>
+      <p:sp>
+        <p:nvSpPr>
+          <p:cNvPr id="5" name="Rounded Rectangle 4"/>
+          <p:cNvSpPr/>
+          <p:nvPr/>
+        </p:nvSpPr>
+        <p:spPr>
+          <a:xfrm>
+            <a:off x="4297680" y="1188720"/>
+            <a:ext cx="3474720" cy="640080"/>
+          </a:xfrm>
+          <a:prstGeom prst="roundRect">
+            <a:avLst/>
+          </a:prstGeom>
+          <a:solidFill>
+            <a:srgbClr val="DCA01E"/>
+          </a:solidFill>
+          <a:ln>
+            <a:noFill/>
+          </a:ln>
+        </p:spPr>
+        <p:style>
+          <a:lnRef idx="1">
+            <a:schemeClr val="accent1"/>
+          </a:lnRef>
+          <a:fillRef idx="3">
+            <a:schemeClr val="accent1"/>
+          </a:fillRef>
+          <a:effectRef idx="2">
+            <a:schemeClr val="accent1"/>
+          </a:effectRef>
+          <a:fontRef idx="minor">
+            <a:schemeClr val="lt1"/>
+          </a:fontRef>
+        </p:style>
+        <p:txBody>
+          <a:bodyPr rtlCol="0" anchor="ctr" wrap="square"/>
+          <a:lstStyle/>
+          <a:p>
+            <a:pPr algn="ctr">
+              <a:defRPr sz="1600" b="1">
+                <a:solidFill>
+                  <a:srgbClr val="FFFFFF"/>
+                </a:solidFill>
+                <a:latin typeface="Calibri"/>
+              </a:defRPr>
+            </a:pPr>
+            <a:r>
+              <a:t>Infection Risk / Biofilm</a:t>
+            </a:r>
+          </a:p>
+        </p:txBody>
+      </p:sp>
+      <p:sp>
+        <p:nvSpPr>
+          <p:cNvPr id="6" name="TextBox 5"/>
           <p:cNvSpPr txBox="1"/>
           <p:nvPr/>
         </p:nvSpPr>
         <p:spPr>
           <a:xfrm>
-            <a:off x="6400800" y="1188720"/>
-            <a:ext cx="5029200" cy="5029200"/>
+            <a:off x="4297680" y="2011680"/>
+            <a:ext cx="3474720" cy="3200400"/>
           </a:xfrm>
           <a:prstGeom prst="rect">
             <a:avLst/>
@@ -6048,9 +5810,9 @@
           <a:p>
             <a:pPr>
               <a:spcAft>
-                <a:spcPts val="640"/>
+                <a:spcPts val="560"/>
               </a:spcAft>
-              <a:defRPr sz="1600" b="1">
+              <a:defRPr sz="1400">
                 <a:solidFill>
                   <a:srgbClr val="3C3C3C"/>
                 </a:solidFill>
@@ -6058,15 +5820,15 @@
               </a:defRPr>
             </a:pPr>
             <a:r>
-              <a:t>• Bigger Picture — Where This Fits</a:t>
+              <a:t>• PHMB (polyhexanide)</a:t>
             </a:r>
           </a:p>
           <a:p>
             <a:pPr>
               <a:spcAft>
-                <a:spcPts val="640"/>
+                <a:spcPts val="560"/>
               </a:spcAft>
-              <a:defRPr sz="1600">
+              <a:defRPr sz="1400">
                 <a:solidFill>
                   <a:srgbClr val="3C3C3C"/>
                 </a:solidFill>
@@ -6074,15 +5836,15 @@
               </a:defRPr>
             </a:pPr>
             <a:r>
-              <a:t>• </a:t>
+              <a:t>• Hypochlorous acid (HOCl)</a:t>
             </a:r>
           </a:p>
           <a:p>
             <a:pPr>
               <a:spcAft>
-                <a:spcPts val="640"/>
+                <a:spcPts val="560"/>
               </a:spcAft>
-              <a:defRPr sz="1600">
+              <a:defRPr sz="1400">
                 <a:solidFill>
                   <a:srgbClr val="3C3C3C"/>
                 </a:solidFill>
@@ -6090,31 +5852,28 @@
               </a:defRPr>
             </a:pPr>
             <a:r>
-              <a:t>• This is step 1 of updating our wound care approach</a:t>
+              <a:t>• Octenidine</a:t>
             </a:r>
           </a:p>
           <a:p>
             <a:pPr>
               <a:spcAft>
-                <a:spcPts val="640"/>
+                <a:spcPts val="560"/>
               </a:spcAft>
-              <a:defRPr sz="1600">
+              <a:defRPr sz="1400">
                 <a:solidFill>
                   <a:srgbClr val="3C3C3C"/>
                 </a:solidFill>
                 <a:latin typeface="Calibri"/>
               </a:defRPr>
             </a:pPr>
-            <a:r>
-              <a:t>• Future areas: wound assessment &amp; documentation, product selection, evidence-based dressing choices</a:t>
-            </a:r>
           </a:p>
           <a:p>
             <a:pPr>
               <a:spcAft>
-                <a:spcPts val="640"/>
+                <a:spcPts val="560"/>
               </a:spcAft>
-              <a:defRPr sz="1600">
+              <a:defRPr sz="1400">
                 <a:solidFill>
                   <a:srgbClr val="3C3C3C"/>
                 </a:solidFill>
@@ -6122,15 +5881,15 @@
               </a:defRPr>
             </a:pPr>
             <a:r>
-              <a:t>• Potential for nurse-led wound clinics</a:t>
+              <a:t>• Modern antiseptics — safe + effective</a:t>
             </a:r>
           </a:p>
           <a:p>
             <a:pPr>
               <a:spcAft>
-                <a:spcPts val="640"/>
+                <a:spcPts val="560"/>
               </a:spcAft>
-              <a:defRPr sz="1600">
+              <a:defRPr sz="1400">
                 <a:solidFill>
                   <a:srgbClr val="3C3C3C"/>
                 </a:solidFill>
@@ -6138,15 +5897,15 @@
               </a:defRPr>
             </a:pPr>
             <a:r>
-              <a:t>• Aligns with Medicare wound management items and best-practice care</a:t>
+              <a:t>• Targeted biofilm disruption</a:t>
             </a:r>
           </a:p>
           <a:p>
             <a:pPr>
               <a:spcAft>
-                <a:spcPts val="640"/>
+                <a:spcPts val="560"/>
               </a:spcAft>
-              <a:defRPr sz="1600">
+              <a:defRPr sz="1400">
                 <a:solidFill>
                   <a:srgbClr val="3C3C3C"/>
                 </a:solidFill>
@@ -6154,21 +5913,238 @@
               </a:defRPr>
             </a:pPr>
             <a:r>
-              <a:t>• I'd love a GP champion to partner on wound care practice updates</a:t>
-            </a:r>
-          </a:p>
-        </p:txBody>
-      </p:sp>
-      <p:sp>
-        <p:nvSpPr>
-          <p:cNvPr id="5" name="Rounded Rectangle 4"/>
+              <a:t>• Lower cytotoxicity than CHX</a:t>
+            </a:r>
+          </a:p>
+          <a:p>
+            <a:pPr>
+              <a:spcAft>
+                <a:spcPts val="560"/>
+              </a:spcAft>
+              <a:defRPr sz="1400">
+                <a:solidFill>
+                  <a:srgbClr val="3C3C3C"/>
+                </a:solidFill>
+                <a:latin typeface="Calibri"/>
+              </a:defRPr>
+            </a:pPr>
+            <a:r>
+              <a:t>• Use purposefully, not prophylactically</a:t>
+            </a:r>
+          </a:p>
+        </p:txBody>
+      </p:sp>
+      <p:sp>
+        <p:nvSpPr>
+          <p:cNvPr id="7" name="Rounded Rectangle 6"/>
           <p:cNvSpPr/>
           <p:nvPr/>
         </p:nvSpPr>
         <p:spPr>
           <a:xfrm>
-            <a:off x="1828800" y="5303520"/>
-            <a:ext cx="8229600" cy="1097280"/>
+            <a:off x="8138160" y="1188720"/>
+            <a:ext cx="3474720" cy="640080"/>
+          </a:xfrm>
+          <a:prstGeom prst="roundRect">
+            <a:avLst/>
+          </a:prstGeom>
+          <a:solidFill>
+            <a:srgbClr val="C83232"/>
+          </a:solidFill>
+          <a:ln>
+            <a:noFill/>
+          </a:ln>
+        </p:spPr>
+        <p:style>
+          <a:lnRef idx="1">
+            <a:schemeClr val="accent1"/>
+          </a:lnRef>
+          <a:fillRef idx="3">
+            <a:schemeClr val="accent1"/>
+          </a:fillRef>
+          <a:effectRef idx="2">
+            <a:schemeClr val="accent1"/>
+          </a:effectRef>
+          <a:fontRef idx="minor">
+            <a:schemeClr val="lt1"/>
+          </a:fontRef>
+        </p:style>
+        <p:txBody>
+          <a:bodyPr rtlCol="0" anchor="ctr" wrap="square"/>
+          <a:lstStyle/>
+          <a:p>
+            <a:pPr algn="ctr">
+              <a:defRPr sz="1600" b="1">
+                <a:solidFill>
+                  <a:srgbClr val="FFFFFF"/>
+                </a:solidFill>
+                <a:latin typeface="Calibri"/>
+              </a:defRPr>
+            </a:pPr>
+            <a:r>
+              <a:t>Avoid for Routine Use</a:t>
+            </a:r>
+          </a:p>
+        </p:txBody>
+      </p:sp>
+      <p:sp>
+        <p:nvSpPr>
+          <p:cNvPr id="8" name="TextBox 7"/>
+          <p:cNvSpPr txBox="1"/>
+          <p:nvPr/>
+        </p:nvSpPr>
+        <p:spPr>
+          <a:xfrm>
+            <a:off x="8138160" y="2011680"/>
+            <a:ext cx="3474720" cy="3200400"/>
+          </a:xfrm>
+          <a:prstGeom prst="rect">
+            <a:avLst/>
+          </a:prstGeom>
+          <a:noFill/>
+        </p:spPr>
+        <p:txBody>
+          <a:bodyPr wrap="square">
+            <a:spAutoFit/>
+          </a:bodyPr>
+          <a:lstStyle/>
+          <a:p>
+            <a:pPr>
+              <a:spcAft>
+                <a:spcPts val="560"/>
+              </a:spcAft>
+              <a:defRPr sz="1400">
+                <a:solidFill>
+                  <a:srgbClr val="3C3C3C"/>
+                </a:solidFill>
+                <a:latin typeface="Calibri"/>
+              </a:defRPr>
+            </a:pPr>
+            <a:r>
+              <a:t>• Chlorhexidine</a:t>
+            </a:r>
+          </a:p>
+          <a:p>
+            <a:pPr>
+              <a:spcAft>
+                <a:spcPts val="560"/>
+              </a:spcAft>
+              <a:defRPr sz="1400">
+                <a:solidFill>
+                  <a:srgbClr val="3C3C3C"/>
+                </a:solidFill>
+                <a:latin typeface="Calibri"/>
+              </a:defRPr>
+            </a:pPr>
+            <a:r>
+              <a:t>• Cetrimide</a:t>
+            </a:r>
+          </a:p>
+          <a:p>
+            <a:pPr>
+              <a:spcAft>
+                <a:spcPts val="560"/>
+              </a:spcAft>
+              <a:defRPr sz="1400">
+                <a:solidFill>
+                  <a:srgbClr val="3C3C3C"/>
+                </a:solidFill>
+                <a:latin typeface="Calibri"/>
+              </a:defRPr>
+            </a:pPr>
+            <a:r>
+              <a:t>• Hydrogen peroxide</a:t>
+            </a:r>
+          </a:p>
+          <a:p>
+            <a:pPr>
+              <a:spcAft>
+                <a:spcPts val="560"/>
+              </a:spcAft>
+              <a:defRPr sz="1400">
+                <a:solidFill>
+                  <a:srgbClr val="3C3C3C"/>
+                </a:solidFill>
+                <a:latin typeface="Calibri"/>
+              </a:defRPr>
+            </a:pPr>
+          </a:p>
+          <a:p>
+            <a:pPr>
+              <a:spcAft>
+                <a:spcPts val="560"/>
+              </a:spcAft>
+              <a:defRPr sz="1400">
+                <a:solidFill>
+                  <a:srgbClr val="3C3C3C"/>
+                </a:solidFill>
+                <a:latin typeface="Calibri"/>
+              </a:defRPr>
+            </a:pPr>
+            <a:r>
+              <a:t>• Cytotoxic to healing cells</a:t>
+            </a:r>
+          </a:p>
+          <a:p>
+            <a:pPr>
+              <a:spcAft>
+                <a:spcPts val="560"/>
+              </a:spcAft>
+              <a:defRPr sz="1400">
+                <a:solidFill>
+                  <a:srgbClr val="3C3C3C"/>
+                </a:solidFill>
+                <a:latin typeface="Calibri"/>
+              </a:defRPr>
+            </a:pPr>
+            <a:r>
+              <a:t>• No evidence of benefit in clean wounds</a:t>
+            </a:r>
+          </a:p>
+          <a:p>
+            <a:pPr>
+              <a:spcAft>
+                <a:spcPts val="560"/>
+              </a:spcAft>
+              <a:defRPr sz="1400">
+                <a:solidFill>
+                  <a:srgbClr val="3C3C3C"/>
+                </a:solidFill>
+                <a:latin typeface="Calibri"/>
+              </a:defRPr>
+            </a:pPr>
+            <a:r>
+              <a:t>• Disrupts wound pH</a:t>
+            </a:r>
+          </a:p>
+          <a:p>
+            <a:pPr>
+              <a:spcAft>
+                <a:spcPts val="560"/>
+              </a:spcAft>
+              <a:defRPr sz="1400">
+                <a:solidFill>
+                  <a:srgbClr val="3C3C3C"/>
+                </a:solidFill>
+                <a:latin typeface="Calibri"/>
+              </a:defRPr>
+            </a:pPr>
+            <a:r>
+              <a:t>• Damages granulation tissue</a:t>
+            </a:r>
+          </a:p>
+        </p:txBody>
+      </p:sp>
+      <p:sp>
+        <p:nvSpPr>
+          <p:cNvPr id="9" name="Rounded Rectangle 8"/>
+          <p:cNvSpPr/>
+          <p:nvPr/>
+        </p:nvSpPr>
+        <p:spPr>
+          <a:xfrm>
+            <a:off x="1371600" y="5303520"/>
+            <a:ext cx="9144000" cy="1097280"/>
           </a:xfrm>
           <a:prstGeom prst="roundRect">
             <a:avLst/>
@@ -6199,13 +6175,7 @@
           <a:lstStyle/>
           <a:p>
             <a:pPr algn="ctr">
-              <a:spcBef>
-                <a:spcPts val="0"/>
-              </a:spcBef>
-              <a:spcAft>
-                <a:spcPts val="0"/>
-              </a:spcAft>
-              <a:defRPr sz="1800" b="1">
+              <a:defRPr sz="1600" b="1">
                 <a:solidFill>
                   <a:srgbClr val="006464"/>
                 </a:solidFill>
@@ -6213,11 +6183,11 @@
               </a:defRPr>
             </a:pPr>
             <a:r>
-              <a:t>💡 This isn't about criticism — it's about giving our patients the best chance to heal.</a:t>
-            </a:r>
-            <a:br/>
-            <a:r>
-              <a:t>Small change, big evidence, better outcomes.</a:t>
+              <a:t>IWII 2025: "Solution selection should align with the wound's infection status"</a:t>
+            </a:r>
+            <a:br/>
+            <a:r>
+              <a:t>Clean wounds = inert solutions  |  Infection/biofilm = targeted modern antiseptics</a:t>
             </a:r>
           </a:p>
         </p:txBody>
@@ -6236,7 +6206,7 @@
     <p:bg>
       <p:bgPr>
         <a:solidFill>
-          <a:srgbClr val="008080"/>
+          <a:srgbClr val="FFFFFF"/>
         </a:solidFill>
         <a:effectLst/>
       </p:bgPr>
@@ -6250,14 +6220,67 @@
       <p:grpSpPr/>
       <p:sp>
         <p:nvSpPr>
-          <p:cNvPr id="2" name="TextBox 1"/>
+          <p:cNvPr id="2" name="Rounded Rectangle 1"/>
+          <p:cNvSpPr/>
+          <p:nvPr/>
+        </p:nvSpPr>
+        <p:spPr>
+          <a:xfrm>
+            <a:off x="0" y="0"/>
+            <a:ext cx="12191695" cy="914400"/>
+          </a:xfrm>
+          <a:prstGeom prst="roundRect">
+            <a:avLst/>
+          </a:prstGeom>
+          <a:solidFill>
+            <a:srgbClr val="008080"/>
+          </a:solidFill>
+          <a:ln>
+            <a:noFill/>
+          </a:ln>
+        </p:spPr>
+        <p:style>
+          <a:lnRef idx="1">
+            <a:schemeClr val="accent1"/>
+          </a:lnRef>
+          <a:fillRef idx="3">
+            <a:schemeClr val="accent1"/>
+          </a:fillRef>
+          <a:effectRef idx="2">
+            <a:schemeClr val="accent1"/>
+          </a:effectRef>
+          <a:fontRef idx="minor">
+            <a:schemeClr val="lt1"/>
+          </a:fontRef>
+        </p:style>
+        <p:txBody>
+          <a:bodyPr rtlCol="0" anchor="ctr" wrap="square"/>
+          <a:lstStyle/>
+          <a:p>
+            <a:pPr algn="ctr">
+              <a:defRPr sz="2800" b="1">
+                <a:solidFill>
+                  <a:srgbClr val="FFFFFF"/>
+                </a:solidFill>
+                <a:latin typeface="Calibri"/>
+              </a:defRPr>
+            </a:pPr>
+            <a:r>
+              <a:t>Wound Cleansing Decision Framework — The Process</a:t>
+            </a:r>
+          </a:p>
+        </p:txBody>
+      </p:sp>
+      <p:sp>
+        <p:nvSpPr>
+          <p:cNvPr id="3" name="TextBox 2"/>
           <p:cNvSpPr txBox="1"/>
           <p:nvPr/>
         </p:nvSpPr>
         <p:spPr>
           <a:xfrm>
-            <a:off x="914400" y="1371600"/>
-            <a:ext cx="10058400" cy="1097280"/>
+            <a:off x="457200" y="1005840"/>
+            <a:ext cx="10972800" cy="457200"/>
           </a:xfrm>
           <a:prstGeom prst="rect">
             <a:avLst/>
@@ -6270,8 +6293,61 @@
           </a:bodyPr>
           <a:lstStyle/>
           <a:p>
+            <a:pPr algn="l">
+              <a:defRPr sz="1400" b="0">
+                <a:solidFill>
+                  <a:srgbClr val="787878"/>
+                </a:solidFill>
+                <a:latin typeface="Calibri"/>
+              </a:defRPr>
+            </a:pPr>
+            <a:r>
+              <a:t>Adapted from the IWII 2025 Wound Cleansing Continuum (p.32)</a:t>
+            </a:r>
+          </a:p>
+        </p:txBody>
+      </p:sp>
+      <p:sp>
+        <p:nvSpPr>
+          <p:cNvPr id="4" name="Rounded Rectangle 3"/>
+          <p:cNvSpPr/>
+          <p:nvPr/>
+        </p:nvSpPr>
+        <p:spPr>
+          <a:xfrm>
+            <a:off x="457200" y="1645920"/>
+            <a:ext cx="2560320" cy="4114800"/>
+          </a:xfrm>
+          <a:prstGeom prst="roundRect">
+            <a:avLst/>
+          </a:prstGeom>
+          <a:solidFill>
+            <a:srgbClr val="008080"/>
+          </a:solidFill>
+          <a:ln>
+            <a:noFill/>
+          </a:ln>
+        </p:spPr>
+        <p:style>
+          <a:lnRef idx="1">
+            <a:schemeClr val="accent1"/>
+          </a:lnRef>
+          <a:fillRef idx="3">
+            <a:schemeClr val="accent1"/>
+          </a:fillRef>
+          <a:effectRef idx="2">
+            <a:schemeClr val="accent1"/>
+          </a:effectRef>
+          <a:fontRef idx="minor">
+            <a:schemeClr val="lt1"/>
+          </a:fontRef>
+        </p:style>
+        <p:txBody>
+          <a:bodyPr rtlCol="0" anchor="ctr" wrap="square"/>
+          <a:lstStyle/>
+          <a:p>
             <a:pPr algn="ctr">
-              <a:defRPr sz="4000" b="1">
+              <a:defRPr sz="1500" b="1">
                 <a:solidFill>
                   <a:srgbClr val="FFFFFF"/>
                 </a:solidFill>
@@ -6279,7 +6355,598 @@
               </a:defRPr>
             </a:pPr>
             <a:r>
-              <a:t>Discussion &amp; Questions</a:t>
+              <a:t>1. ASSESS</a:t>
+            </a:r>
+            <a:br/>
+            <a:br/>
+            <a:br/>
+            <a:r>
+              <a:t>Examine:</a:t>
+            </a:r>
+            <a:br/>
+            <a:r>
+              <a:t>&gt; Wound bed</a:t>
+            </a:r>
+            <a:br/>
+            <a:r>
+              <a:t>&gt; Wound edges</a:t>
+            </a:r>
+            <a:br/>
+            <a:r>
+              <a:t>&gt; Periwound skin</a:t>
+            </a:r>
+            <a:br/>
+            <a:r>
+              <a:t>&gt; Surrounding skin</a:t>
+            </a:r>
+            <a:br/>
+            <a:br/>
+            <a:r>
+              <a:t>What do you see?</a:t>
+            </a:r>
+            <a:br/>
+            <a:r>
+              <a:t>What has changed</a:t>
+            </a:r>
+            <a:br/>
+            <a:r>
+              <a:t>since last visit?</a:t>
+            </a:r>
+          </a:p>
+        </p:txBody>
+      </p:sp>
+      <p:sp>
+        <p:nvSpPr>
+          <p:cNvPr id="5" name="Oval 4"/>
+          <p:cNvSpPr/>
+          <p:nvPr/>
+        </p:nvSpPr>
+        <p:spPr>
+          <a:xfrm>
+            <a:off x="3291840" y="3200400"/>
+            <a:ext cx="457200" cy="457200"/>
+          </a:xfrm>
+          <a:prstGeom prst="ellipse">
+            <a:avLst/>
+          </a:prstGeom>
+          <a:solidFill>
+            <a:srgbClr val="FFFFFF"/>
+          </a:solidFill>
+          <a:ln>
+            <a:noFill/>
+          </a:ln>
+        </p:spPr>
+        <p:style>
+          <a:lnRef idx="1">
+            <a:schemeClr val="accent1"/>
+          </a:lnRef>
+          <a:fillRef idx="3">
+            <a:schemeClr val="accent1"/>
+          </a:fillRef>
+          <a:effectRef idx="2">
+            <a:schemeClr val="accent1"/>
+          </a:effectRef>
+          <a:fontRef idx="minor">
+            <a:schemeClr val="lt1"/>
+          </a:fontRef>
+        </p:style>
+        <p:txBody>
+          <a:bodyPr rtlCol="0" anchor="ctr" wrap="square"/>
+          <a:lstStyle/>
+          <a:p>
+            <a:pPr algn="ctr">
+              <a:defRPr sz="1800" b="1">
+                <a:solidFill>
+                  <a:srgbClr val="008080"/>
+                </a:solidFill>
+                <a:latin typeface="Calibri"/>
+              </a:defRPr>
+            </a:pPr>
+            <a:r>
+              <a:t>=&gt;</a:t>
+            </a:r>
+          </a:p>
+        </p:txBody>
+      </p:sp>
+      <p:sp>
+        <p:nvSpPr>
+          <p:cNvPr id="6" name="Rounded Rectangle 5"/>
+          <p:cNvSpPr/>
+          <p:nvPr/>
+        </p:nvSpPr>
+        <p:spPr>
+          <a:xfrm>
+            <a:off x="3931920" y="1645920"/>
+            <a:ext cx="2560320" cy="4114800"/>
+          </a:xfrm>
+          <a:prstGeom prst="roundRect">
+            <a:avLst/>
+          </a:prstGeom>
+          <a:solidFill>
+            <a:srgbClr val="DCA01E"/>
+          </a:solidFill>
+          <a:ln>
+            <a:noFill/>
+          </a:ln>
+        </p:spPr>
+        <p:style>
+          <a:lnRef idx="1">
+            <a:schemeClr val="accent1"/>
+          </a:lnRef>
+          <a:fillRef idx="3">
+            <a:schemeClr val="accent1"/>
+          </a:fillRef>
+          <a:effectRef idx="2">
+            <a:schemeClr val="accent1"/>
+          </a:effectRef>
+          <a:fontRef idx="minor">
+            <a:schemeClr val="lt1"/>
+          </a:fontRef>
+        </p:style>
+        <p:txBody>
+          <a:bodyPr rtlCol="0" anchor="ctr" wrap="square"/>
+          <a:lstStyle/>
+          <a:p>
+            <a:pPr algn="ctr">
+              <a:defRPr sz="1500" b="1">
+                <a:solidFill>
+                  <a:srgbClr val="FFFFFF"/>
+                </a:solidFill>
+                <a:latin typeface="Calibri"/>
+              </a:defRPr>
+            </a:pPr>
+            <a:r>
+              <a:t>2. DECIDE</a:t>
+            </a:r>
+            <a:br/>
+            <a:br/>
+            <a:br/>
+            <a:r>
+              <a:t>Determine wound</a:t>
+            </a:r>
+            <a:br/>
+            <a:r>
+              <a:t>infection status:</a:t>
+            </a:r>
+            <a:br/>
+            <a:br/>
+            <a:r>
+              <a:t>&gt; Bacterial balance?</a:t>
+            </a:r>
+            <a:br/>
+            <a:r>
+              <a:t>&gt; Local infection?</a:t>
+            </a:r>
+            <a:br/>
+            <a:r>
+              <a:t>&gt; Spreading infection?</a:t>
+            </a:r>
+            <a:br/>
+            <a:r>
+              <a:t>&gt; Biofilm suspected?</a:t>
+            </a:r>
+            <a:br/>
+            <a:br/>
+            <a:r>
+              <a:t>This drives your</a:t>
+            </a:r>
+            <a:br/>
+            <a:r>
+              <a:t>solution choice</a:t>
+            </a:r>
+          </a:p>
+        </p:txBody>
+      </p:sp>
+      <p:sp>
+        <p:nvSpPr>
+          <p:cNvPr id="7" name="Oval 6"/>
+          <p:cNvSpPr/>
+          <p:nvPr/>
+        </p:nvSpPr>
+        <p:spPr>
+          <a:xfrm>
+            <a:off x="6675120" y="3200400"/>
+            <a:ext cx="457200" cy="457200"/>
+          </a:xfrm>
+          <a:prstGeom prst="ellipse">
+            <a:avLst/>
+          </a:prstGeom>
+          <a:solidFill>
+            <a:srgbClr val="FFFFFF"/>
+          </a:solidFill>
+          <a:ln>
+            <a:noFill/>
+          </a:ln>
+        </p:spPr>
+        <p:style>
+          <a:lnRef idx="1">
+            <a:schemeClr val="accent1"/>
+          </a:lnRef>
+          <a:fillRef idx="3">
+            <a:schemeClr val="accent1"/>
+          </a:fillRef>
+          <a:effectRef idx="2">
+            <a:schemeClr val="accent1"/>
+          </a:effectRef>
+          <a:fontRef idx="minor">
+            <a:schemeClr val="lt1"/>
+          </a:fontRef>
+        </p:style>
+        <p:txBody>
+          <a:bodyPr rtlCol="0" anchor="ctr" wrap="square"/>
+          <a:lstStyle/>
+          <a:p>
+            <a:pPr algn="ctr">
+              <a:defRPr sz="1800" b="1">
+                <a:solidFill>
+                  <a:srgbClr val="008080"/>
+                </a:solidFill>
+                <a:latin typeface="Calibri"/>
+              </a:defRPr>
+            </a:pPr>
+            <a:r>
+              <a:t>=&gt;</a:t>
+            </a:r>
+          </a:p>
+        </p:txBody>
+      </p:sp>
+      <p:sp>
+        <p:nvSpPr>
+          <p:cNvPr id="8" name="Rounded Rectangle 7"/>
+          <p:cNvSpPr/>
+          <p:nvPr/>
+        </p:nvSpPr>
+        <p:spPr>
+          <a:xfrm>
+            <a:off x="7315200" y="1645920"/>
+            <a:ext cx="2286000" cy="4114800"/>
+          </a:xfrm>
+          <a:prstGeom prst="roundRect">
+            <a:avLst/>
+          </a:prstGeom>
+          <a:solidFill>
+            <a:srgbClr val="28A050"/>
+          </a:solidFill>
+          <a:ln>
+            <a:noFill/>
+          </a:ln>
+        </p:spPr>
+        <p:style>
+          <a:lnRef idx="1">
+            <a:schemeClr val="accent1"/>
+          </a:lnRef>
+          <a:fillRef idx="3">
+            <a:schemeClr val="accent1"/>
+          </a:fillRef>
+          <a:effectRef idx="2">
+            <a:schemeClr val="accent1"/>
+          </a:effectRef>
+          <a:fontRef idx="minor">
+            <a:schemeClr val="lt1"/>
+          </a:fontRef>
+        </p:style>
+        <p:txBody>
+          <a:bodyPr rtlCol="0" anchor="ctr" wrap="square"/>
+          <a:lstStyle/>
+          <a:p>
+            <a:pPr algn="ctr">
+              <a:defRPr sz="1500" b="1">
+                <a:solidFill>
+                  <a:srgbClr val="FFFFFF"/>
+                </a:solidFill>
+                <a:latin typeface="Calibri"/>
+              </a:defRPr>
+            </a:pPr>
+            <a:r>
+              <a:t>3. SELECT</a:t>
+            </a:r>
+            <a:br/>
+            <a:br/>
+            <a:br/>
+            <a:r>
+              <a:t>Choose:</a:t>
+            </a:r>
+            <a:br/>
+            <a:r>
+              <a:t>&gt; Solution</a:t>
+            </a:r>
+            <a:br/>
+            <a:r>
+              <a:t>&gt; Technique</a:t>
+            </a:r>
+            <a:br/>
+            <a:r>
+              <a:t>&gt; Irrigation pressure</a:t>
+            </a:r>
+            <a:br/>
+            <a:r>
+              <a:t>&gt; Frequency</a:t>
+            </a:r>
+            <a:br/>
+            <a:br/>
+            <a:r>
+              <a:t>Match solution</a:t>
+            </a:r>
+            <a:br/>
+            <a:r>
+              <a:t>to wound status</a:t>
+            </a:r>
+            <a:br/>
+            <a:r>
+              <a:t>(see next slide)</a:t>
+            </a:r>
+          </a:p>
+        </p:txBody>
+      </p:sp>
+      <p:sp>
+        <p:nvSpPr>
+          <p:cNvPr id="9" name="Oval 8"/>
+          <p:cNvSpPr/>
+          <p:nvPr/>
+        </p:nvSpPr>
+        <p:spPr>
+          <a:xfrm>
+            <a:off x="9784080" y="3200400"/>
+            <a:ext cx="457200" cy="457200"/>
+          </a:xfrm>
+          <a:prstGeom prst="ellipse">
+            <a:avLst/>
+          </a:prstGeom>
+          <a:solidFill>
+            <a:srgbClr val="FFFFFF"/>
+          </a:solidFill>
+          <a:ln>
+            <a:noFill/>
+          </a:ln>
+        </p:spPr>
+        <p:style>
+          <a:lnRef idx="1">
+            <a:schemeClr val="accent1"/>
+          </a:lnRef>
+          <a:fillRef idx="3">
+            <a:schemeClr val="accent1"/>
+          </a:fillRef>
+          <a:effectRef idx="2">
+            <a:schemeClr val="accent1"/>
+          </a:effectRef>
+          <a:fontRef idx="minor">
+            <a:schemeClr val="lt1"/>
+          </a:fontRef>
+        </p:style>
+        <p:txBody>
+          <a:bodyPr rtlCol="0" anchor="ctr" wrap="square"/>
+          <a:lstStyle/>
+          <a:p>
+            <a:pPr algn="ctr">
+              <a:defRPr sz="1800" b="1">
+                <a:solidFill>
+                  <a:srgbClr val="008080"/>
+                </a:solidFill>
+                <a:latin typeface="Calibri"/>
+              </a:defRPr>
+            </a:pPr>
+            <a:r>
+              <a:t>=&gt;</a:t>
+            </a:r>
+          </a:p>
+        </p:txBody>
+      </p:sp>
+      <p:sp>
+        <p:nvSpPr>
+          <p:cNvPr id="10" name="Rounded Rectangle 9"/>
+          <p:cNvSpPr/>
+          <p:nvPr/>
+        </p:nvSpPr>
+        <p:spPr>
+          <a:xfrm>
+            <a:off x="10424160" y="1645920"/>
+            <a:ext cx="1371600" cy="4114800"/>
+          </a:xfrm>
+          <a:prstGeom prst="roundRect">
+            <a:avLst/>
+          </a:prstGeom>
+          <a:solidFill>
+            <a:srgbClr val="006464"/>
+          </a:solidFill>
+          <a:ln>
+            <a:noFill/>
+          </a:ln>
+        </p:spPr>
+        <p:style>
+          <a:lnRef idx="1">
+            <a:schemeClr val="accent1"/>
+          </a:lnRef>
+          <a:fillRef idx="3">
+            <a:schemeClr val="accent1"/>
+          </a:fillRef>
+          <a:effectRef idx="2">
+            <a:schemeClr val="accent1"/>
+          </a:effectRef>
+          <a:fontRef idx="minor">
+            <a:schemeClr val="lt1"/>
+          </a:fontRef>
+        </p:style>
+        <p:txBody>
+          <a:bodyPr rtlCol="0" anchor="ctr" wrap="square"/>
+          <a:lstStyle/>
+          <a:p>
+            <a:pPr algn="ctr">
+              <a:defRPr sz="1400" b="1">
+                <a:solidFill>
+                  <a:srgbClr val="FFFFFF"/>
+                </a:solidFill>
+                <a:latin typeface="Calibri"/>
+              </a:defRPr>
+            </a:pPr>
+            <a:r>
+              <a:t>4.</a:t>
+            </a:r>
+            <a:br/>
+            <a:r>
+              <a:t>EVALUATE</a:t>
+            </a:r>
+            <a:br/>
+            <a:br/>
+            <a:br/>
+            <a:r>
+              <a:t>Is the</a:t>
+            </a:r>
+            <a:br/>
+            <a:r>
+              <a:t>wound</a:t>
+            </a:r>
+            <a:br/>
+            <a:r>
+              <a:t>improving?</a:t>
+            </a:r>
+            <a:br/>
+            <a:br/>
+            <a:r>
+              <a:t>If not,</a:t>
+            </a:r>
+            <a:br/>
+            <a:r>
+              <a:t>reassess</a:t>
+            </a:r>
+            <a:br/>
+            <a:r>
+              <a:t>and</a:t>
+            </a:r>
+            <a:br/>
+            <a:r>
+              <a:t>adjust</a:t>
+            </a:r>
+          </a:p>
+        </p:txBody>
+      </p:sp>
+      <p:sp>
+        <p:nvSpPr>
+          <p:cNvPr id="11" name="Rounded Rectangle 10"/>
+          <p:cNvSpPr/>
+          <p:nvPr/>
+        </p:nvSpPr>
+        <p:spPr>
+          <a:xfrm>
+            <a:off x="1371600" y="6035040"/>
+            <a:ext cx="9144000" cy="640080"/>
+          </a:xfrm>
+          <a:prstGeom prst="roundRect">
+            <a:avLst/>
+          </a:prstGeom>
+          <a:solidFill>
+            <a:srgbClr val="DCF5F5"/>
+          </a:solidFill>
+          <a:ln>
+            <a:noFill/>
+          </a:ln>
+        </p:spPr>
+        <p:style>
+          <a:lnRef idx="1">
+            <a:schemeClr val="accent1"/>
+          </a:lnRef>
+          <a:fillRef idx="3">
+            <a:schemeClr val="accent1"/>
+          </a:fillRef>
+          <a:effectRef idx="2">
+            <a:schemeClr val="accent1"/>
+          </a:effectRef>
+          <a:fontRef idx="minor">
+            <a:schemeClr val="lt1"/>
+          </a:fontRef>
+        </p:style>
+        <p:txBody>
+          <a:bodyPr rtlCol="0" anchor="ctr" wrap="square"/>
+          <a:lstStyle/>
+          <a:p>
+            <a:pPr algn="ctr">
+              <a:defRPr sz="1600" b="1">
+                <a:solidFill>
+                  <a:srgbClr val="006464"/>
+                </a:solidFill>
+                <a:latin typeface="Calibri"/>
+              </a:defRPr>
+            </a:pPr>
+            <a:r>
+              <a:t>Key principle: ASSESS before you pour — the wound status determines the solution, not habit</a:t>
+            </a:r>
+          </a:p>
+        </p:txBody>
+      </p:sp>
+    </p:spTree>
+  </p:cSld>
+  <p:clrMapOvr>
+    <a:masterClrMapping/>
+  </p:clrMapOvr>
+</p:sld>
+</file>
+
+<file path=ppt/slides/slide8.xml><?xml version="1.0" encoding="utf-8"?>
+<p:sld xmlns:a="http://schemas.openxmlformats.org/drawingml/2006/main" xmlns:p="http://schemas.openxmlformats.org/presentationml/2006/main" xmlns:r="http://schemas.openxmlformats.org/officeDocument/2006/relationships">
+  <p:cSld>
+    <p:bg>
+      <p:bgPr>
+        <a:solidFill>
+          <a:srgbClr val="FFFFFF"/>
+        </a:solidFill>
+        <a:effectLst/>
+      </p:bgPr>
+    </p:bg>
+    <p:spTree>
+      <p:nvGrpSpPr>
+        <p:cNvPr id="1" name=""/>
+        <p:cNvGrpSpPr/>
+        <p:nvPr/>
+      </p:nvGrpSpPr>
+      <p:grpSpPr/>
+      <p:sp>
+        <p:nvSpPr>
+          <p:cNvPr id="2" name="Rounded Rectangle 1"/>
+          <p:cNvSpPr/>
+          <p:nvPr/>
+        </p:nvSpPr>
+        <p:spPr>
+          <a:xfrm>
+            <a:off x="0" y="0"/>
+            <a:ext cx="12191695" cy="914400"/>
+          </a:xfrm>
+          <a:prstGeom prst="roundRect">
+            <a:avLst/>
+          </a:prstGeom>
+          <a:solidFill>
+            <a:srgbClr val="008080"/>
+          </a:solidFill>
+          <a:ln>
+            <a:noFill/>
+          </a:ln>
+        </p:spPr>
+        <p:style>
+          <a:lnRef idx="1">
+            <a:schemeClr val="accent1"/>
+          </a:lnRef>
+          <a:fillRef idx="3">
+            <a:schemeClr val="accent1"/>
+          </a:fillRef>
+          <a:effectRef idx="2">
+            <a:schemeClr val="accent1"/>
+          </a:effectRef>
+          <a:fontRef idx="minor">
+            <a:schemeClr val="lt1"/>
+          </a:fontRef>
+        </p:style>
+        <p:txBody>
+          <a:bodyPr rtlCol="0" anchor="ctr" wrap="square"/>
+          <a:lstStyle/>
+          <a:p>
+            <a:pPr algn="ctr">
+              <a:defRPr sz="2800" b="1">
+                <a:solidFill>
+                  <a:srgbClr val="FFFFFF"/>
+                </a:solidFill>
+                <a:latin typeface="Calibri"/>
+              </a:defRPr>
+            </a:pPr>
+            <a:r>
+              <a:t>Wound Cleansing Pathways — Matching Solution to Status</a:t>
             </a:r>
           </a:p>
         </p:txBody>
@@ -6292,8 +6959,8 @@
         </p:nvSpPr>
         <p:spPr>
           <a:xfrm>
-            <a:off x="914400" y="2743200"/>
-            <a:ext cx="10058400" cy="731520"/>
+            <a:off x="457200" y="1005840"/>
+            <a:ext cx="10972800" cy="457200"/>
           </a:xfrm>
           <a:prstGeom prst="rect">
             <a:avLst/>
@@ -6306,30 +6973,407 @@
           </a:bodyPr>
           <a:lstStyle/>
           <a:p>
+            <a:pPr algn="l">
+              <a:defRPr sz="1400" b="0">
+                <a:solidFill>
+                  <a:srgbClr val="787878"/>
+                </a:solidFill>
+                <a:latin typeface="Calibri"/>
+              </a:defRPr>
+            </a:pPr>
+            <a:r>
+              <a:t>Adapted from the IWII 2025 Wound Cleansing Continuum (p.32)</a:t>
+            </a:r>
+          </a:p>
+        </p:txBody>
+      </p:sp>
+      <p:sp>
+        <p:nvSpPr>
+          <p:cNvPr id="4" name="Rounded Rectangle 3"/>
+          <p:cNvSpPr/>
+          <p:nvPr/>
+        </p:nvSpPr>
+        <p:spPr>
+          <a:xfrm>
+            <a:off x="274320" y="1645920"/>
+            <a:ext cx="3657600" cy="4572000"/>
+          </a:xfrm>
+          <a:prstGeom prst="roundRect">
+            <a:avLst/>
+          </a:prstGeom>
+          <a:solidFill>
+            <a:srgbClr val="E6FAF0"/>
+          </a:solidFill>
+          <a:ln>
+            <a:noFill/>
+          </a:ln>
+        </p:spPr>
+        <p:style>
+          <a:lnRef idx="1">
+            <a:schemeClr val="accent1"/>
+          </a:lnRef>
+          <a:fillRef idx="3">
+            <a:schemeClr val="accent1"/>
+          </a:fillRef>
+          <a:effectRef idx="2">
+            <a:schemeClr val="accent1"/>
+          </a:effectRef>
+          <a:fontRef idx="minor">
+            <a:schemeClr val="lt1"/>
+          </a:fontRef>
+        </p:style>
+        <p:txBody>
+          <a:bodyPr rtlCol="0" anchor="ctr" wrap="square"/>
+          <a:lstStyle/>
+          <a:p>
             <a:pPr algn="ctr">
-              <a:defRPr sz="2400" b="0">
-                <a:solidFill>
-                  <a:srgbClr val="C8F0F0"/>
-                </a:solidFill>
-                <a:latin typeface="Calibri"/>
-              </a:defRPr>
-            </a:pPr>
-            <a:r>
-              <a:t>What are your thoughts?</a:t>
-            </a:r>
-          </a:p>
-        </p:txBody>
-      </p:sp>
-      <p:sp>
-        <p:nvSpPr>
-          <p:cNvPr id="4" name="TextBox 3"/>
+              <a:defRPr sz="1400" b="0">
+                <a:solidFill>
+                  <a:srgbClr val="006464"/>
+                </a:solidFill>
+                <a:latin typeface="Calibri"/>
+              </a:defRPr>
+            </a:pPr>
+            <a:r>
+              <a:t>BACTERIAL BALANCE</a:t>
+            </a:r>
+            <a:br/>
+            <a:r>
+              <a:t>(Most of our wounds)</a:t>
+            </a:r>
+            <a:br/>
+            <a:br/>
+            <a:r>
+              <a:t>Solution:</a:t>
+            </a:r>
+            <a:br/>
+            <a:r>
+              <a:t>&gt; Normal saline (0.9% NaCl)</a:t>
+            </a:r>
+            <a:br/>
+            <a:r>
+              <a:t>&gt; Potable / tap water</a:t>
+            </a:r>
+            <a:br/>
+            <a:br/>
+            <a:r>
+              <a:t>Technique:</a:t>
+            </a:r>
+            <a:br/>
+            <a:r>
+              <a:t>&gt; Gentle irrigation</a:t>
+            </a:r>
+            <a:br/>
+            <a:r>
+              <a:t>&gt; Cleanse wound bed, edges</a:t>
+            </a:r>
+            <a:br/>
+            <a:r>
+              <a:t>   and periwound skin</a:t>
+            </a:r>
+            <a:br/>
+            <a:br/>
+            <a:r>
+              <a:t>Frequency:</a:t>
+            </a:r>
+            <a:br/>
+            <a:r>
+              <a:t>&gt; Each dressing change</a:t>
+            </a:r>
+            <a:br/>
+            <a:r>
+              <a:t>&gt; Reassess at every visit</a:t>
+            </a:r>
+          </a:p>
+        </p:txBody>
+      </p:sp>
+      <p:sp>
+        <p:nvSpPr>
+          <p:cNvPr id="5" name="Rounded Rectangle 4"/>
+          <p:cNvSpPr/>
+          <p:nvPr/>
+        </p:nvSpPr>
+        <p:spPr>
+          <a:xfrm>
+            <a:off x="4206240" y="1645920"/>
+            <a:ext cx="3657600" cy="4572000"/>
+          </a:xfrm>
+          <a:prstGeom prst="roundRect">
+            <a:avLst/>
+          </a:prstGeom>
+          <a:solidFill>
+            <a:srgbClr val="FFF8E6"/>
+          </a:solidFill>
+          <a:ln>
+            <a:noFill/>
+          </a:ln>
+        </p:spPr>
+        <p:style>
+          <a:lnRef idx="1">
+            <a:schemeClr val="accent1"/>
+          </a:lnRef>
+          <a:fillRef idx="3">
+            <a:schemeClr val="accent1"/>
+          </a:fillRef>
+          <a:effectRef idx="2">
+            <a:schemeClr val="accent1"/>
+          </a:effectRef>
+          <a:fontRef idx="minor">
+            <a:schemeClr val="lt1"/>
+          </a:fontRef>
+        </p:style>
+        <p:txBody>
+          <a:bodyPr rtlCol="0" anchor="ctr" wrap="square"/>
+          <a:lstStyle/>
+          <a:p>
+            <a:pPr algn="ctr">
+              <a:defRPr sz="1400" b="0">
+                <a:solidFill>
+                  <a:srgbClr val="3C3C3C"/>
+                </a:solidFill>
+                <a:latin typeface="Calibri"/>
+              </a:defRPr>
+            </a:pPr>
+            <a:r>
+              <a:t>BIOFILM / AT RISK</a:t>
+            </a:r>
+            <a:br/>
+            <a:br/>
+            <a:br/>
+            <a:r>
+              <a:t>Solution:</a:t>
+            </a:r>
+            <a:br/>
+            <a:r>
+              <a:t>&gt; PHMB (polyhexanide)</a:t>
+            </a:r>
+            <a:br/>
+            <a:r>
+              <a:t>&gt; Hypochlorous acid (HOCl)</a:t>
+            </a:r>
+            <a:br/>
+            <a:r>
+              <a:t>&gt; Octenidine</a:t>
+            </a:r>
+            <a:br/>
+            <a:br/>
+            <a:r>
+              <a:t>Technique:</a:t>
+            </a:r>
+            <a:br/>
+            <a:r>
+              <a:t>&gt; Active mechanical cleansing</a:t>
+            </a:r>
+            <a:br/>
+            <a:r>
+              <a:t>&gt; Wound bed preparation</a:t>
+            </a:r>
+            <a:br/>
+            <a:r>
+              <a:t>&gt; Debridement if indicated</a:t>
+            </a:r>
+            <a:br/>
+            <a:br/>
+            <a:r>
+              <a:t>Key: Treat the cause,</a:t>
+            </a:r>
+            <a:br/>
+            <a:r>
+              <a:t>not routine prophylaxis</a:t>
+            </a:r>
+          </a:p>
+        </p:txBody>
+      </p:sp>
+      <p:sp>
+        <p:nvSpPr>
+          <p:cNvPr id="6" name="Rounded Rectangle 5"/>
+          <p:cNvSpPr/>
+          <p:nvPr/>
+        </p:nvSpPr>
+        <p:spPr>
+          <a:xfrm>
+            <a:off x="8138160" y="1645920"/>
+            <a:ext cx="3657600" cy="4572000"/>
+          </a:xfrm>
+          <a:prstGeom prst="roundRect">
+            <a:avLst/>
+          </a:prstGeom>
+          <a:solidFill>
+            <a:srgbClr val="FFEBEB"/>
+          </a:solidFill>
+          <a:ln>
+            <a:noFill/>
+          </a:ln>
+        </p:spPr>
+        <p:style>
+          <a:lnRef idx="1">
+            <a:schemeClr val="accent1"/>
+          </a:lnRef>
+          <a:fillRef idx="3">
+            <a:schemeClr val="accent1"/>
+          </a:fillRef>
+          <a:effectRef idx="2">
+            <a:schemeClr val="accent1"/>
+          </a:effectRef>
+          <a:fontRef idx="minor">
+            <a:schemeClr val="lt1"/>
+          </a:fontRef>
+        </p:style>
+        <p:txBody>
+          <a:bodyPr rtlCol="0" anchor="ctr" wrap="square"/>
+          <a:lstStyle/>
+          <a:p>
+            <a:pPr algn="ctr">
+              <a:defRPr sz="1400" b="0">
+                <a:solidFill>
+                  <a:srgbClr val="C83232"/>
+                </a:solidFill>
+                <a:latin typeface="Calibri"/>
+              </a:defRPr>
+            </a:pPr>
+            <a:r>
+              <a:t>INFECTED WOUND</a:t>
+            </a:r>
+            <a:br/>
+            <a:br/>
+            <a:br/>
+            <a:r>
+              <a:t>Solution:</a:t>
+            </a:r>
+            <a:br/>
+            <a:r>
+              <a:t>&gt; Antimicrobial cleanser</a:t>
+            </a:r>
+            <a:br/>
+            <a:r>
+              <a:t>&gt; + systemic Abx as needed</a:t>
+            </a:r>
+            <a:br/>
+            <a:br/>
+            <a:r>
+              <a:t>Technique:</a:t>
+            </a:r>
+            <a:br/>
+            <a:r>
+              <a:t>&gt; Discuss with GP</a:t>
+            </a:r>
+            <a:br/>
+            <a:r>
+              <a:t>&gt; Swab if clinically indicated</a:t>
+            </a:r>
+            <a:br/>
+            <a:r>
+              <a:t>&gt; Targeted short-term antiseptic</a:t>
+            </a:r>
+            <a:br/>
+            <a:br/>
+            <a:r>
+              <a:t>Key: Step DOWN to saline</a:t>
+            </a:r>
+            <a:br/>
+            <a:r>
+              <a:t>when infection resolves.</a:t>
+            </a:r>
+            <a:br/>
+            <a:r>
+              <a:t>Don't continue antiseptic</a:t>
+            </a:r>
+            <a:br/>
+            <a:r>
+              <a:t>indefinitely</a:t>
+            </a:r>
+          </a:p>
+        </p:txBody>
+      </p:sp>
+    </p:spTree>
+  </p:cSld>
+  <p:clrMapOvr>
+    <a:masterClrMapping/>
+  </p:clrMapOvr>
+</p:sld>
+</file>
+
+<file path=ppt/slides/slide9.xml><?xml version="1.0" encoding="utf-8"?>
+<p:sld xmlns:a="http://schemas.openxmlformats.org/drawingml/2006/main" xmlns:p="http://schemas.openxmlformats.org/presentationml/2006/main" xmlns:r="http://schemas.openxmlformats.org/officeDocument/2006/relationships">
+  <p:cSld>
+    <p:bg>
+      <p:bgPr>
+        <a:solidFill>
+          <a:srgbClr val="FFFFFF"/>
+        </a:solidFill>
+        <a:effectLst/>
+      </p:bgPr>
+    </p:bg>
+    <p:spTree>
+      <p:nvGrpSpPr>
+        <p:cNvPr id="1" name=""/>
+        <p:cNvGrpSpPr/>
+        <p:nvPr/>
+      </p:nvGrpSpPr>
+      <p:grpSpPr/>
+      <p:sp>
+        <p:nvSpPr>
+          <p:cNvPr id="2" name="Rounded Rectangle 1"/>
+          <p:cNvSpPr/>
+          <p:nvPr/>
+        </p:nvSpPr>
+        <p:spPr>
+          <a:xfrm>
+            <a:off x="0" y="0"/>
+            <a:ext cx="12191695" cy="914400"/>
+          </a:xfrm>
+          <a:prstGeom prst="roundRect">
+            <a:avLst/>
+          </a:prstGeom>
+          <a:solidFill>
+            <a:srgbClr val="008080"/>
+          </a:solidFill>
+          <a:ln>
+            <a:noFill/>
+          </a:ln>
+        </p:spPr>
+        <p:style>
+          <a:lnRef idx="1">
+            <a:schemeClr val="accent1"/>
+          </a:lnRef>
+          <a:fillRef idx="3">
+            <a:schemeClr val="accent1"/>
+          </a:fillRef>
+          <a:effectRef idx="2">
+            <a:schemeClr val="accent1"/>
+          </a:effectRef>
+          <a:fontRef idx="minor">
+            <a:schemeClr val="lt1"/>
+          </a:fontRef>
+        </p:style>
+        <p:txBody>
+          <a:bodyPr rtlCol="0" anchor="ctr" wrap="square"/>
+          <a:lstStyle/>
+          <a:p>
+            <a:pPr algn="ctr">
+              <a:defRPr sz="2800" b="1">
+                <a:solidFill>
+                  <a:srgbClr val="FFFFFF"/>
+                </a:solidFill>
+                <a:latin typeface="Calibri"/>
+              </a:defRPr>
+            </a:pPr>
+            <a:r>
+              <a:t>What I'm Proposing We Consider</a:t>
+            </a:r>
+          </a:p>
+        </p:txBody>
+      </p:sp>
+      <p:sp>
+        <p:nvSpPr>
+          <p:cNvPr id="3" name="TextBox 2"/>
           <p:cNvSpPr txBox="1"/>
           <p:nvPr/>
         </p:nvSpPr>
         <p:spPr>
           <a:xfrm>
-            <a:off x="2286000" y="3657600"/>
-            <a:ext cx="7315200" cy="2286000"/>
+            <a:off x="731520" y="1188720"/>
+            <a:ext cx="5029200" cy="5029200"/>
           </a:xfrm>
           <a:prstGeom prst="rect">
             <a:avLst/>
@@ -6344,63 +7388,108 @@
           <a:p>
             <a:pPr>
               <a:spcAft>
-                <a:spcPts val="800"/>
+                <a:spcPts val="640"/>
               </a:spcAft>
-              <a:defRPr sz="2000">
-                <a:solidFill>
-                  <a:srgbClr val="C8F0F0"/>
-                </a:solidFill>
-                <a:latin typeface="Calibri"/>
-              </a:defRPr>
-            </a:pPr>
-            <a:r>
-              <a:t>• Would anyone be interested in championing this with me?</a:t>
+              <a:defRPr sz="1600" b="1">
+                <a:solidFill>
+                  <a:srgbClr val="3C3C3C"/>
+                </a:solidFill>
+                <a:latin typeface="Calibri"/>
+              </a:defRPr>
+            </a:pPr>
+            <a:r>
+              <a:t>• Immediate — Wound Cleansing</a:t>
             </a:r>
           </a:p>
           <a:p>
             <a:pPr>
               <a:spcAft>
-                <a:spcPts val="800"/>
+                <a:spcPts val="640"/>
               </a:spcAft>
-              <a:defRPr sz="2000">
-                <a:solidFill>
-                  <a:srgbClr val="C8F0F0"/>
-                </a:solidFill>
-                <a:latin typeface="Calibri"/>
-              </a:defRPr>
-            </a:pPr>
-            <a:r>
-              <a:t>• Can we trial saline-first cleansing for 4 weeks?</a:t>
-            </a:r>
+              <a:defRPr sz="1600">
+                <a:solidFill>
+                  <a:srgbClr val="3C3C3C"/>
+                </a:solidFill>
+                <a:latin typeface="Calibri"/>
+              </a:defRPr>
+            </a:pPr>
           </a:p>
           <a:p>
             <a:pPr>
               <a:spcAft>
-                <a:spcPts val="800"/>
+                <a:spcPts val="640"/>
               </a:spcAft>
-              <a:defRPr sz="2000">
-                <a:solidFill>
-                  <a:srgbClr val="C8F0F0"/>
-                </a:solidFill>
-                <a:latin typeface="Calibri"/>
-              </a:defRPr>
-            </a:pPr>
-            <a:r>
-              <a:t>• Would a wound cleansing quick-reference card be useful?</a:t>
-            </a:r>
-          </a:p>
-        </p:txBody>
-      </p:sp>
-      <p:sp>
-        <p:nvSpPr>
-          <p:cNvPr id="5" name="TextBox 4"/>
+              <a:defRPr sz="1600">
+                <a:solidFill>
+                  <a:srgbClr val="3C3C3C"/>
+                </a:solidFill>
+                <a:latin typeface="Calibri"/>
+              </a:defRPr>
+            </a:pPr>
+            <a:r>
+              <a:t>• Switch routine wound cleansing to normal saline or potable water for non-infected wounds</a:t>
+            </a:r>
+          </a:p>
+          <a:p>
+            <a:pPr>
+              <a:spcAft>
+                <a:spcPts val="640"/>
+              </a:spcAft>
+              <a:defRPr sz="1600">
+                <a:solidFill>
+                  <a:srgbClr val="3C3C3C"/>
+                </a:solidFill>
+                <a:latin typeface="Calibri"/>
+              </a:defRPr>
+            </a:pPr>
+            <a:r>
+              <a:t>• Reserve antiseptics (PHMB, HOCl) for wounds with suspected infection or biofilm</a:t>
+            </a:r>
+          </a:p>
+          <a:p>
+            <a:pPr>
+              <a:spcAft>
+                <a:spcPts val="640"/>
+              </a:spcAft>
+              <a:defRPr sz="1600">
+                <a:solidFill>
+                  <a:srgbClr val="3C3C3C"/>
+                </a:solidFill>
+                <a:latin typeface="Calibri"/>
+              </a:defRPr>
+            </a:pPr>
+            <a:r>
+              <a:t>• Stop routine chlorhexidine + cetrimide use on healing wounds</a:t>
+            </a:r>
+          </a:p>
+          <a:p>
+            <a:pPr>
+              <a:spcAft>
+                <a:spcPts val="640"/>
+              </a:spcAft>
+              <a:defRPr sz="1600">
+                <a:solidFill>
+                  <a:srgbClr val="3C3C3C"/>
+                </a:solidFill>
+                <a:latin typeface="Calibri"/>
+              </a:defRPr>
+            </a:pPr>
+            <a:r>
+              <a:t>• Adopt a cleansing decision framework based on wound status (adapted from IWII 2025)</a:t>
+            </a:r>
+          </a:p>
+        </p:txBody>
+      </p:sp>
+      <p:sp>
+        <p:nvSpPr>
+          <p:cNvPr id="4" name="TextBox 3"/>
           <p:cNvSpPr txBox="1"/>
           <p:nvPr/>
         </p:nvSpPr>
         <p:spPr>
           <a:xfrm>
-            <a:off x="914400" y="5669280"/>
-            <a:ext cx="10058400" cy="731520"/>
+            <a:off x="6400800" y="1188720"/>
+            <a:ext cx="5029200" cy="5029200"/>
           </a:xfrm>
           <a:prstGeom prst="rect">
             <a:avLst/>
@@ -6413,20 +7502,169 @@
           </a:bodyPr>
           <a:lstStyle/>
           <a:p>
+            <a:pPr>
+              <a:spcAft>
+                <a:spcPts val="640"/>
+              </a:spcAft>
+              <a:defRPr sz="1600" b="1">
+                <a:solidFill>
+                  <a:srgbClr val="3C3C3C"/>
+                </a:solidFill>
+                <a:latin typeface="Calibri"/>
+              </a:defRPr>
+            </a:pPr>
+            <a:r>
+              <a:t>• Bigger Picture — Where This Fits</a:t>
+            </a:r>
+          </a:p>
+          <a:p>
+            <a:pPr>
+              <a:spcAft>
+                <a:spcPts val="640"/>
+              </a:spcAft>
+              <a:defRPr sz="1600">
+                <a:solidFill>
+                  <a:srgbClr val="3C3C3C"/>
+                </a:solidFill>
+                <a:latin typeface="Calibri"/>
+              </a:defRPr>
+            </a:pPr>
+          </a:p>
+          <a:p>
+            <a:pPr>
+              <a:spcAft>
+                <a:spcPts val="640"/>
+              </a:spcAft>
+              <a:defRPr sz="1600">
+                <a:solidFill>
+                  <a:srgbClr val="3C3C3C"/>
+                </a:solidFill>
+                <a:latin typeface="Calibri"/>
+              </a:defRPr>
+            </a:pPr>
+            <a:r>
+              <a:t>• This is step 1 of updating our wound care approach</a:t>
+            </a:r>
+          </a:p>
+          <a:p>
+            <a:pPr>
+              <a:spcAft>
+                <a:spcPts val="640"/>
+              </a:spcAft>
+              <a:defRPr sz="1600">
+                <a:solidFill>
+                  <a:srgbClr val="3C3C3C"/>
+                </a:solidFill>
+                <a:latin typeface="Calibri"/>
+              </a:defRPr>
+            </a:pPr>
+            <a:r>
+              <a:t>• Future: wound assessment, documentation, product selection, evidence-based dressings</a:t>
+            </a:r>
+          </a:p>
+          <a:p>
+            <a:pPr>
+              <a:spcAft>
+                <a:spcPts val="640"/>
+              </a:spcAft>
+              <a:defRPr sz="1600">
+                <a:solidFill>
+                  <a:srgbClr val="3C3C3C"/>
+                </a:solidFill>
+                <a:latin typeface="Calibri"/>
+              </a:defRPr>
+            </a:pPr>
+            <a:r>
+              <a:t>• Potential for nurse-led wound clinics</a:t>
+            </a:r>
+          </a:p>
+          <a:p>
+            <a:pPr>
+              <a:spcAft>
+                <a:spcPts val="640"/>
+              </a:spcAft>
+              <a:defRPr sz="1600">
+                <a:solidFill>
+                  <a:srgbClr val="3C3C3C"/>
+                </a:solidFill>
+                <a:latin typeface="Calibri"/>
+              </a:defRPr>
+            </a:pPr>
+            <a:r>
+              <a:t>• Aligns with Medicare wound management items and best-practice care</a:t>
+            </a:r>
+          </a:p>
+          <a:p>
+            <a:pPr>
+              <a:spcAft>
+                <a:spcPts val="640"/>
+              </a:spcAft>
+              <a:defRPr sz="1600">
+                <a:solidFill>
+                  <a:srgbClr val="3C3C3C"/>
+                </a:solidFill>
+                <a:latin typeface="Calibri"/>
+              </a:defRPr>
+            </a:pPr>
+            <a:r>
+              <a:t>• I'd love a GP champion to partner on wound care practice updates</a:t>
+            </a:r>
+          </a:p>
+        </p:txBody>
+      </p:sp>
+      <p:sp>
+        <p:nvSpPr>
+          <p:cNvPr id="5" name="Rounded Rectangle 4"/>
+          <p:cNvSpPr/>
+          <p:nvPr/>
+        </p:nvSpPr>
+        <p:spPr>
+          <a:xfrm>
+            <a:off x="1828800" y="5303520"/>
+            <a:ext cx="8229600" cy="1097280"/>
+          </a:xfrm>
+          <a:prstGeom prst="roundRect">
+            <a:avLst/>
+          </a:prstGeom>
+          <a:solidFill>
+            <a:srgbClr val="DCF5F5"/>
+          </a:solidFill>
+          <a:ln>
+            <a:noFill/>
+          </a:ln>
+        </p:spPr>
+        <p:style>
+          <a:lnRef idx="1">
+            <a:schemeClr val="accent1"/>
+          </a:lnRef>
+          <a:fillRef idx="3">
+            <a:schemeClr val="accent1"/>
+          </a:fillRef>
+          <a:effectRef idx="2">
+            <a:schemeClr val="accent1"/>
+          </a:effectRef>
+          <a:fontRef idx="minor">
+            <a:schemeClr val="lt1"/>
+          </a:fontRef>
+        </p:style>
+        <p:txBody>
+          <a:bodyPr rtlCol="0" anchor="ctr" wrap="square"/>
+          <a:lstStyle/>
+          <a:p>
             <a:pPr algn="ctr">
-              <a:defRPr sz="1400" b="0">
-                <a:solidFill>
-                  <a:srgbClr val="A0C8C8"/>
-                </a:solidFill>
-                <a:latin typeface="Calibri"/>
-              </a:defRPr>
-            </a:pPr>
-            <a:r>
-              <a:t>Reference: IWII (2025) Therapeutic Wound &amp; Skin Cleansing:</a:t>
-            </a:r>
-            <a:br/>
-            <a:r>
-              <a:t>Clinical Evidence and Recommendations. Wounds International.</a:t>
+              <a:defRPr sz="1800" b="1">
+                <a:solidFill>
+                  <a:srgbClr val="006464"/>
+                </a:solidFill>
+                <a:latin typeface="Calibri"/>
+              </a:defRPr>
+            </a:pPr>
+            <a:r>
+              <a:t>This isn't about criticism — it's about giving our patients the best chance to heal.</a:t>
+            </a:r>
+            <a:br/>
+            <a:r>
+              <a:t>Small change, big evidence, better outcomes.</a:t>
             </a:r>
           </a:p>
         </p:txBody>
